--- a/docs/pptx/carbo/ritu-carbo-linsubhr-sens-anyhosp_10pct.pptx
+++ b/docs/pptx/carbo/ritu-carbo-linsubhr-sens-anyhosp_10pct.pptx
@@ -2443,7 +2443,7 @@
           </p:nvSpPr>
           <p:spPr>
             <a:xfrm>
-              <a:off x="1325501" y="2073503"/>
+              <a:off x="1325928" y="2073503"/>
               <a:ext cx="0" cy="3649639"/>
             </a:xfrm>
             <a:custGeom>
@@ -2486,7 +2486,7 @@
           </p:nvSpPr>
           <p:spPr>
             <a:xfrm>
-              <a:off x="2239092" y="2073503"/>
+              <a:off x="2237914" y="2073503"/>
               <a:ext cx="0" cy="3649639"/>
             </a:xfrm>
             <a:custGeom>
@@ -2529,7 +2529,7 @@
           </p:nvSpPr>
           <p:spPr>
             <a:xfrm>
-              <a:off x="3152683" y="2073503"/>
+              <a:off x="3149900" y="2073503"/>
               <a:ext cx="0" cy="3649639"/>
             </a:xfrm>
             <a:custGeom>
@@ -2572,7 +2572,7 @@
           </p:nvSpPr>
           <p:spPr>
             <a:xfrm>
-              <a:off x="4066274" y="2073503"/>
+              <a:off x="4061886" y="2073503"/>
               <a:ext cx="0" cy="3649639"/>
             </a:xfrm>
             <a:custGeom>
@@ -2615,7 +2615,7 @@
           </p:nvSpPr>
           <p:spPr>
             <a:xfrm>
-              <a:off x="4979865" y="2073503"/>
+              <a:off x="4973872" y="2073503"/>
               <a:ext cx="0" cy="3649639"/>
             </a:xfrm>
             <a:custGeom>
@@ -2658,7 +2658,7 @@
           </p:nvSpPr>
           <p:spPr>
             <a:xfrm>
-              <a:off x="5893456" y="2073503"/>
+              <a:off x="5885859" y="2073503"/>
               <a:ext cx="0" cy="3649639"/>
             </a:xfrm>
             <a:custGeom>
@@ -2701,7 +2701,7 @@
           </p:nvSpPr>
           <p:spPr>
             <a:xfrm>
-              <a:off x="6807046" y="2073503"/>
+              <a:off x="6797845" y="2073503"/>
               <a:ext cx="0" cy="3649639"/>
             </a:xfrm>
             <a:custGeom>
@@ -2744,7 +2744,7 @@
           </p:nvSpPr>
           <p:spPr>
             <a:xfrm>
-              <a:off x="7720637" y="2073503"/>
+              <a:off x="7709831" y="2073503"/>
               <a:ext cx="0" cy="3649639"/>
             </a:xfrm>
             <a:custGeom>
@@ -3002,7 +3002,7 @@
           </p:nvSpPr>
           <p:spPr>
             <a:xfrm>
-              <a:off x="868706" y="2073503"/>
+              <a:off x="869934" y="2073503"/>
               <a:ext cx="0" cy="3649639"/>
             </a:xfrm>
             <a:custGeom>
@@ -3045,7 +3045,7 @@
           </p:nvSpPr>
           <p:spPr>
             <a:xfrm>
-              <a:off x="1782297" y="2073503"/>
+              <a:off x="1781921" y="2073503"/>
               <a:ext cx="0" cy="3649639"/>
             </a:xfrm>
             <a:custGeom>
@@ -3088,7 +3088,7 @@
           </p:nvSpPr>
           <p:spPr>
             <a:xfrm>
-              <a:off x="2695888" y="2073503"/>
+              <a:off x="2693907" y="2073503"/>
               <a:ext cx="0" cy="3649639"/>
             </a:xfrm>
             <a:custGeom>
@@ -3131,7 +3131,7 @@
           </p:nvSpPr>
           <p:spPr>
             <a:xfrm>
-              <a:off x="3609478" y="2073503"/>
+              <a:off x="3605893" y="2073503"/>
               <a:ext cx="0" cy="3649639"/>
             </a:xfrm>
             <a:custGeom>
@@ -3174,7 +3174,7 @@
           </p:nvSpPr>
           <p:spPr>
             <a:xfrm>
-              <a:off x="4523069" y="2073503"/>
+              <a:off x="4517879" y="2073503"/>
               <a:ext cx="0" cy="3649639"/>
             </a:xfrm>
             <a:custGeom>
@@ -3217,7 +3217,7 @@
           </p:nvSpPr>
           <p:spPr>
             <a:xfrm>
-              <a:off x="5436660" y="2073503"/>
+              <a:off x="5429866" y="2073503"/>
               <a:ext cx="0" cy="3649639"/>
             </a:xfrm>
             <a:custGeom>
@@ -3260,7 +3260,7 @@
           </p:nvSpPr>
           <p:spPr>
             <a:xfrm>
-              <a:off x="6350251" y="2073503"/>
+              <a:off x="6341852" y="2073503"/>
               <a:ext cx="0" cy="3649639"/>
             </a:xfrm>
             <a:custGeom>
@@ -3303,7 +3303,7 @@
           </p:nvSpPr>
           <p:spPr>
             <a:xfrm>
-              <a:off x="7263842" y="2073503"/>
+              <a:off x="7253838" y="2073503"/>
               <a:ext cx="0" cy="3649639"/>
             </a:xfrm>
             <a:custGeom>
@@ -3346,7 +3346,7 @@
           </p:nvSpPr>
           <p:spPr>
             <a:xfrm>
-              <a:off x="8177433" y="2073503"/>
+              <a:off x="8165824" y="2073503"/>
               <a:ext cx="0" cy="3649639"/>
             </a:xfrm>
             <a:custGeom>
@@ -3389,612 +3389,612 @@
           </p:nvSpPr>
           <p:spPr>
             <a:xfrm>
-              <a:off x="1172049" y="2125749"/>
-              <a:ext cx="7090630" cy="3217286"/>
+              <a:off x="1172049" y="2147843"/>
+              <a:ext cx="7090630" cy="3196444"/>
             </a:xfrm>
             <a:custGeom>
               <a:avLst/>
               <a:pathLst>
-                <a:path w="7090630" h="3217286">
+                <a:path w="7090630" h="3196444">
                   <a:moveTo>
-                    <a:pt x="0" y="1807266"/>
+                    <a:pt x="0" y="1782628"/>
                   </a:moveTo>
                   <a:lnTo>
-                    <a:pt x="71622" y="1829699"/>
-                  </a:lnTo>
-                  <a:lnTo>
-                    <a:pt x="143245" y="1851822"/>
-                  </a:lnTo>
-                  <a:lnTo>
-                    <a:pt x="214867" y="1873640"/>
-                  </a:lnTo>
-                  <a:lnTo>
-                    <a:pt x="286490" y="1895157"/>
-                  </a:lnTo>
-                  <a:lnTo>
-                    <a:pt x="358112" y="1916376"/>
-                  </a:lnTo>
-                  <a:lnTo>
-                    <a:pt x="429735" y="1937302"/>
-                  </a:lnTo>
-                  <a:lnTo>
-                    <a:pt x="501357" y="1957939"/>
-                  </a:lnTo>
-                  <a:lnTo>
-                    <a:pt x="572980" y="1978291"/>
-                  </a:lnTo>
-                  <a:lnTo>
-                    <a:pt x="644602" y="1998362"/>
-                  </a:lnTo>
-                  <a:lnTo>
-                    <a:pt x="716225" y="2018156"/>
-                  </a:lnTo>
-                  <a:lnTo>
-                    <a:pt x="787847" y="2037677"/>
-                  </a:lnTo>
-                  <a:lnTo>
-                    <a:pt x="859470" y="2056927"/>
-                  </a:lnTo>
-                  <a:lnTo>
-                    <a:pt x="931092" y="2075912"/>
-                  </a:lnTo>
-                  <a:lnTo>
-                    <a:pt x="1002715" y="2094635"/>
-                  </a:lnTo>
-                  <a:lnTo>
-                    <a:pt x="1074337" y="2113099"/>
-                  </a:lnTo>
-                  <a:lnTo>
-                    <a:pt x="1145960" y="2131308"/>
-                  </a:lnTo>
-                  <a:lnTo>
-                    <a:pt x="1217582" y="2149266"/>
-                  </a:lnTo>
-                  <a:lnTo>
-                    <a:pt x="1289205" y="2166976"/>
-                  </a:lnTo>
-                  <a:lnTo>
-                    <a:pt x="1360827" y="2184441"/>
-                  </a:lnTo>
-                  <a:lnTo>
-                    <a:pt x="1432450" y="2201664"/>
-                  </a:lnTo>
-                  <a:lnTo>
-                    <a:pt x="1504073" y="2218650"/>
-                  </a:lnTo>
-                  <a:lnTo>
-                    <a:pt x="1575695" y="2235402"/>
-                  </a:lnTo>
-                  <a:lnTo>
-                    <a:pt x="1647318" y="2251921"/>
-                  </a:lnTo>
-                  <a:lnTo>
-                    <a:pt x="1718940" y="2268213"/>
-                  </a:lnTo>
-                  <a:lnTo>
-                    <a:pt x="1790563" y="2284280"/>
-                  </a:lnTo>
-                  <a:lnTo>
-                    <a:pt x="1862185" y="2300125"/>
-                  </a:lnTo>
-                  <a:lnTo>
-                    <a:pt x="1933808" y="2315751"/>
-                  </a:lnTo>
-                  <a:lnTo>
-                    <a:pt x="2005430" y="2331161"/>
-                  </a:lnTo>
-                  <a:lnTo>
-                    <a:pt x="2077053" y="2346358"/>
-                  </a:lnTo>
-                  <a:lnTo>
-                    <a:pt x="2148675" y="2361346"/>
-                  </a:lnTo>
-                  <a:lnTo>
-                    <a:pt x="2220298" y="2376126"/>
-                  </a:lnTo>
-                  <a:lnTo>
-                    <a:pt x="2291920" y="2390703"/>
-                  </a:lnTo>
-                  <a:lnTo>
-                    <a:pt x="2363543" y="2405078"/>
-                  </a:lnTo>
-                  <a:lnTo>
-                    <a:pt x="2435165" y="2419254"/>
-                  </a:lnTo>
-                  <a:lnTo>
-                    <a:pt x="2506788" y="2433235"/>
-                  </a:lnTo>
-                  <a:lnTo>
-                    <a:pt x="2578410" y="2447022"/>
-                  </a:lnTo>
-                  <a:lnTo>
-                    <a:pt x="2650033" y="2460619"/>
-                  </a:lnTo>
-                  <a:lnTo>
-                    <a:pt x="2721655" y="2474029"/>
-                  </a:lnTo>
-                  <a:lnTo>
-                    <a:pt x="2793278" y="2487253"/>
-                  </a:lnTo>
-                  <a:lnTo>
-                    <a:pt x="2864901" y="2500294"/>
-                  </a:lnTo>
-                  <a:lnTo>
-                    <a:pt x="2936523" y="2513156"/>
-                  </a:lnTo>
-                  <a:lnTo>
-                    <a:pt x="3008146" y="2525839"/>
-                  </a:lnTo>
-                  <a:lnTo>
-                    <a:pt x="3079768" y="2538348"/>
-                  </a:lnTo>
-                  <a:lnTo>
-                    <a:pt x="3151391" y="2550684"/>
-                  </a:lnTo>
-                  <a:lnTo>
-                    <a:pt x="3223013" y="2562849"/>
-                  </a:lnTo>
-                  <a:lnTo>
-                    <a:pt x="3294636" y="2574847"/>
-                  </a:lnTo>
-                  <a:lnTo>
-                    <a:pt x="3366258" y="2586678"/>
-                  </a:lnTo>
-                  <a:lnTo>
-                    <a:pt x="3437881" y="2598347"/>
-                  </a:lnTo>
-                  <a:lnTo>
-                    <a:pt x="3509503" y="2586062"/>
-                  </a:lnTo>
-                  <a:lnTo>
-                    <a:pt x="3581126" y="2562039"/>
-                  </a:lnTo>
-                  <a:lnTo>
-                    <a:pt x="3652748" y="2537334"/>
-                  </a:lnTo>
-                  <a:lnTo>
-                    <a:pt x="3724371" y="2511927"/>
-                  </a:lnTo>
-                  <a:lnTo>
-                    <a:pt x="3795993" y="2485799"/>
-                  </a:lnTo>
-                  <a:lnTo>
-                    <a:pt x="3867616" y="2458927"/>
-                  </a:lnTo>
-                  <a:lnTo>
-                    <a:pt x="3939238" y="2431292"/>
-                  </a:lnTo>
-                  <a:lnTo>
-                    <a:pt x="4010861" y="2402872"/>
-                  </a:lnTo>
-                  <a:lnTo>
-                    <a:pt x="4082483" y="2373645"/>
-                  </a:lnTo>
-                  <a:lnTo>
-                    <a:pt x="4154106" y="2343587"/>
-                  </a:lnTo>
-                  <a:lnTo>
-                    <a:pt x="4225729" y="2312675"/>
-                  </a:lnTo>
-                  <a:lnTo>
-                    <a:pt x="4297351" y="2280884"/>
-                  </a:lnTo>
-                  <a:lnTo>
-                    <a:pt x="4368974" y="2248190"/>
-                  </a:lnTo>
-                  <a:lnTo>
-                    <a:pt x="4440596" y="2214568"/>
-                  </a:lnTo>
-                  <a:lnTo>
-                    <a:pt x="4512219" y="2179990"/>
-                  </a:lnTo>
-                  <a:lnTo>
-                    <a:pt x="4583841" y="2144429"/>
-                  </a:lnTo>
-                  <a:lnTo>
-                    <a:pt x="4655464" y="2107858"/>
-                  </a:lnTo>
-                  <a:lnTo>
-                    <a:pt x="4727086" y="2070248"/>
-                  </a:lnTo>
-                  <a:lnTo>
-                    <a:pt x="4798709" y="2031569"/>
-                  </a:lnTo>
-                  <a:lnTo>
-                    <a:pt x="4870331" y="1991791"/>
-                  </a:lnTo>
-                  <a:lnTo>
-                    <a:pt x="4941954" y="1950883"/>
-                  </a:lnTo>
-                  <a:lnTo>
-                    <a:pt x="5013576" y="1908813"/>
-                  </a:lnTo>
-                  <a:lnTo>
-                    <a:pt x="5085199" y="1865547"/>
-                  </a:lnTo>
-                  <a:lnTo>
-                    <a:pt x="5156821" y="1821051"/>
-                  </a:lnTo>
-                  <a:lnTo>
-                    <a:pt x="5228444" y="1775292"/>
-                  </a:lnTo>
-                  <a:lnTo>
-                    <a:pt x="5300066" y="1728232"/>
-                  </a:lnTo>
-                  <a:lnTo>
-                    <a:pt x="5371689" y="1679835"/>
-                  </a:lnTo>
-                  <a:lnTo>
-                    <a:pt x="5443311" y="1630063"/>
-                  </a:lnTo>
-                  <a:lnTo>
-                    <a:pt x="5514934" y="1578877"/>
-                  </a:lnTo>
-                  <a:lnTo>
-                    <a:pt x="5586557" y="1526236"/>
-                  </a:lnTo>
-                  <a:lnTo>
-                    <a:pt x="5658179" y="1472100"/>
-                  </a:lnTo>
-                  <a:lnTo>
-                    <a:pt x="5729802" y="1416425"/>
-                  </a:lnTo>
-                  <a:lnTo>
-                    <a:pt x="5801424" y="1359168"/>
-                  </a:lnTo>
-                  <a:lnTo>
-                    <a:pt x="5873047" y="1300285"/>
-                  </a:lnTo>
-                  <a:lnTo>
-                    <a:pt x="5944669" y="1239728"/>
-                  </a:lnTo>
-                  <a:lnTo>
-                    <a:pt x="6016292" y="1177451"/>
-                  </a:lnTo>
-                  <a:lnTo>
-                    <a:pt x="6087914" y="1113404"/>
-                  </a:lnTo>
-                  <a:lnTo>
-                    <a:pt x="6159537" y="1047537"/>
-                  </a:lnTo>
-                  <a:lnTo>
-                    <a:pt x="6231159" y="979799"/>
-                  </a:lnTo>
-                  <a:lnTo>
-                    <a:pt x="6302782" y="910136"/>
-                  </a:lnTo>
-                  <a:lnTo>
-                    <a:pt x="6374404" y="838493"/>
-                  </a:lnTo>
-                  <a:lnTo>
-                    <a:pt x="6446027" y="764815"/>
-                  </a:lnTo>
-                  <a:lnTo>
-                    <a:pt x="6517649" y="689044"/>
-                  </a:lnTo>
-                  <a:lnTo>
-                    <a:pt x="6589272" y="611119"/>
-                  </a:lnTo>
-                  <a:lnTo>
-                    <a:pt x="6660894" y="530980"/>
-                  </a:lnTo>
-                  <a:lnTo>
-                    <a:pt x="6732517" y="448565"/>
-                  </a:lnTo>
-                  <a:lnTo>
-                    <a:pt x="6804139" y="363807"/>
-                  </a:lnTo>
-                  <a:lnTo>
-                    <a:pt x="6875762" y="276641"/>
-                  </a:lnTo>
-                  <a:lnTo>
-                    <a:pt x="6947385" y="186999"/>
-                  </a:lnTo>
-                  <a:lnTo>
-                    <a:pt x="7019007" y="94809"/>
+                    <a:pt x="71622" y="1805047"/>
+                  </a:lnTo>
+                  <a:lnTo>
+                    <a:pt x="143245" y="1827157"/>
+                  </a:lnTo>
+                  <a:lnTo>
+                    <a:pt x="214867" y="1848963"/>
+                  </a:lnTo>
+                  <a:lnTo>
+                    <a:pt x="286490" y="1870468"/>
+                  </a:lnTo>
+                  <a:lnTo>
+                    <a:pt x="358112" y="1891676"/>
+                  </a:lnTo>
+                  <a:lnTo>
+                    <a:pt x="429735" y="1912592"/>
+                  </a:lnTo>
+                  <a:lnTo>
+                    <a:pt x="501357" y="1933220"/>
+                  </a:lnTo>
+                  <a:lnTo>
+                    <a:pt x="572980" y="1953564"/>
+                  </a:lnTo>
+                  <a:lnTo>
+                    <a:pt x="644602" y="1973627"/>
+                  </a:lnTo>
+                  <a:lnTo>
+                    <a:pt x="716225" y="1993414"/>
+                  </a:lnTo>
+                  <a:lnTo>
+                    <a:pt x="787847" y="2012928"/>
+                  </a:lnTo>
+                  <a:lnTo>
+                    <a:pt x="859470" y="2032173"/>
+                  </a:lnTo>
+                  <a:lnTo>
+                    <a:pt x="931092" y="2051153"/>
+                  </a:lnTo>
+                  <a:lnTo>
+                    <a:pt x="1002715" y="2069872"/>
+                  </a:lnTo>
+                  <a:lnTo>
+                    <a:pt x="1074337" y="2088332"/>
+                  </a:lnTo>
+                  <a:lnTo>
+                    <a:pt x="1145960" y="2106538"/>
+                  </a:lnTo>
+                  <a:lnTo>
+                    <a:pt x="1217582" y="2124494"/>
+                  </a:lnTo>
+                  <a:lnTo>
+                    <a:pt x="1289205" y="2142201"/>
+                  </a:lnTo>
+                  <a:lnTo>
+                    <a:pt x="1360827" y="2159665"/>
+                  </a:lnTo>
+                  <a:lnTo>
+                    <a:pt x="1432450" y="2176888"/>
+                  </a:lnTo>
+                  <a:lnTo>
+                    <a:pt x="1504073" y="2193874"/>
+                  </a:lnTo>
+                  <a:lnTo>
+                    <a:pt x="1575695" y="2210625"/>
+                  </a:lnTo>
+                  <a:lnTo>
+                    <a:pt x="1647318" y="2227146"/>
+                  </a:lnTo>
+                  <a:lnTo>
+                    <a:pt x="1718940" y="2243439"/>
+                  </a:lnTo>
+                  <a:lnTo>
+                    <a:pt x="1790563" y="2259507"/>
+                  </a:lnTo>
+                  <a:lnTo>
+                    <a:pt x="1862185" y="2275354"/>
+                  </a:lnTo>
+                  <a:lnTo>
+                    <a:pt x="1933808" y="2290983"/>
+                  </a:lnTo>
+                  <a:lnTo>
+                    <a:pt x="2005430" y="2306396"/>
+                  </a:lnTo>
+                  <a:lnTo>
+                    <a:pt x="2077053" y="2321597"/>
+                  </a:lnTo>
+                  <a:lnTo>
+                    <a:pt x="2148675" y="2336588"/>
+                  </a:lnTo>
+                  <a:lnTo>
+                    <a:pt x="2220298" y="2351373"/>
+                  </a:lnTo>
+                  <a:lnTo>
+                    <a:pt x="2291920" y="2365954"/>
+                  </a:lnTo>
+                  <a:lnTo>
+                    <a:pt x="2363543" y="2380334"/>
+                  </a:lnTo>
+                  <a:lnTo>
+                    <a:pt x="2435165" y="2394516"/>
+                  </a:lnTo>
+                  <a:lnTo>
+                    <a:pt x="2506788" y="2408503"/>
+                  </a:lnTo>
+                  <a:lnTo>
+                    <a:pt x="2578410" y="2422296"/>
+                  </a:lnTo>
+                  <a:lnTo>
+                    <a:pt x="2650033" y="2435900"/>
+                  </a:lnTo>
+                  <a:lnTo>
+                    <a:pt x="2721655" y="2449316"/>
+                  </a:lnTo>
+                  <a:lnTo>
+                    <a:pt x="2793278" y="2462547"/>
+                  </a:lnTo>
+                  <a:lnTo>
+                    <a:pt x="2864901" y="2475596"/>
+                  </a:lnTo>
+                  <a:lnTo>
+                    <a:pt x="2936523" y="2488465"/>
+                  </a:lnTo>
+                  <a:lnTo>
+                    <a:pt x="3008146" y="2501157"/>
+                  </a:lnTo>
+                  <a:lnTo>
+                    <a:pt x="3079768" y="2513674"/>
+                  </a:lnTo>
+                  <a:lnTo>
+                    <a:pt x="3151391" y="2526018"/>
+                  </a:lnTo>
+                  <a:lnTo>
+                    <a:pt x="3223013" y="2538192"/>
+                  </a:lnTo>
+                  <a:lnTo>
+                    <a:pt x="3294636" y="2550199"/>
+                  </a:lnTo>
+                  <a:lnTo>
+                    <a:pt x="3366258" y="2562040"/>
+                  </a:lnTo>
+                  <a:lnTo>
+                    <a:pt x="3437881" y="2573717"/>
+                  </a:lnTo>
+                  <a:lnTo>
+                    <a:pt x="3509503" y="2569157"/>
+                  </a:lnTo>
+                  <a:lnTo>
+                    <a:pt x="3581126" y="2545287"/>
+                  </a:lnTo>
+                  <a:lnTo>
+                    <a:pt x="3652748" y="2520740"/>
+                  </a:lnTo>
+                  <a:lnTo>
+                    <a:pt x="3724371" y="2495494"/>
+                  </a:lnTo>
+                  <a:lnTo>
+                    <a:pt x="3795993" y="2469532"/>
+                  </a:lnTo>
+                  <a:lnTo>
+                    <a:pt x="3867616" y="2442832"/>
+                  </a:lnTo>
+                  <a:lnTo>
+                    <a:pt x="3939238" y="2415374"/>
+                  </a:lnTo>
+                  <a:lnTo>
+                    <a:pt x="4010861" y="2387135"/>
+                  </a:lnTo>
+                  <a:lnTo>
+                    <a:pt x="4082483" y="2358095"/>
+                  </a:lnTo>
+                  <a:lnTo>
+                    <a:pt x="4154106" y="2328229"/>
+                  </a:lnTo>
+                  <a:lnTo>
+                    <a:pt x="4225729" y="2297515"/>
+                  </a:lnTo>
+                  <a:lnTo>
+                    <a:pt x="4297351" y="2265929"/>
+                  </a:lnTo>
+                  <a:lnTo>
+                    <a:pt x="4368974" y="2233445"/>
+                  </a:lnTo>
+                  <a:lnTo>
+                    <a:pt x="4440596" y="2200038"/>
+                  </a:lnTo>
+                  <a:lnTo>
+                    <a:pt x="4512219" y="2165683"/>
+                  </a:lnTo>
+                  <a:lnTo>
+                    <a:pt x="4583841" y="2130351"/>
+                  </a:lnTo>
+                  <a:lnTo>
+                    <a:pt x="4655464" y="2094016"/>
+                  </a:lnTo>
+                  <a:lnTo>
+                    <a:pt x="4727086" y="2056648"/>
+                  </a:lnTo>
+                  <a:lnTo>
+                    <a:pt x="4798709" y="2018219"/>
+                  </a:lnTo>
+                  <a:lnTo>
+                    <a:pt x="4870331" y="1978698"/>
+                  </a:lnTo>
+                  <a:lnTo>
+                    <a:pt x="4941954" y="1938055"/>
+                  </a:lnTo>
+                  <a:lnTo>
+                    <a:pt x="5013576" y="1896257"/>
+                  </a:lnTo>
+                  <a:lnTo>
+                    <a:pt x="5085199" y="1853272"/>
+                  </a:lnTo>
+                  <a:lnTo>
+                    <a:pt x="5156821" y="1809065"/>
+                  </a:lnTo>
+                  <a:lnTo>
+                    <a:pt x="5228444" y="1763603"/>
+                  </a:lnTo>
+                  <a:lnTo>
+                    <a:pt x="5300066" y="1716849"/>
+                  </a:lnTo>
+                  <a:lnTo>
+                    <a:pt x="5371689" y="1668767"/>
+                  </a:lnTo>
+                  <a:lnTo>
+                    <a:pt x="5443311" y="1619319"/>
+                  </a:lnTo>
+                  <a:lnTo>
+                    <a:pt x="5514934" y="1568466"/>
+                  </a:lnTo>
+                  <a:lnTo>
+                    <a:pt x="5586557" y="1516169"/>
+                  </a:lnTo>
+                  <a:lnTo>
+                    <a:pt x="5658179" y="1462386"/>
+                  </a:lnTo>
+                  <a:lnTo>
+                    <a:pt x="5729802" y="1407075"/>
+                  </a:lnTo>
+                  <a:lnTo>
+                    <a:pt x="5801424" y="1350193"/>
+                  </a:lnTo>
+                  <a:lnTo>
+                    <a:pt x="5873047" y="1291695"/>
+                  </a:lnTo>
+                  <a:lnTo>
+                    <a:pt x="5944669" y="1231535"/>
+                  </a:lnTo>
+                  <a:lnTo>
+                    <a:pt x="6016292" y="1169666"/>
+                  </a:lnTo>
+                  <a:lnTo>
+                    <a:pt x="6087914" y="1106040"/>
+                  </a:lnTo>
+                  <a:lnTo>
+                    <a:pt x="6159537" y="1040606"/>
+                  </a:lnTo>
+                  <a:lnTo>
+                    <a:pt x="6231159" y="973313"/>
+                  </a:lnTo>
+                  <a:lnTo>
+                    <a:pt x="6302782" y="904109"/>
+                  </a:lnTo>
+                  <a:lnTo>
+                    <a:pt x="6374404" y="832939"/>
+                  </a:lnTo>
+                  <a:lnTo>
+                    <a:pt x="6446027" y="759747"/>
+                  </a:lnTo>
+                  <a:lnTo>
+                    <a:pt x="6517649" y="684475"/>
+                  </a:lnTo>
+                  <a:lnTo>
+                    <a:pt x="6589272" y="607066"/>
+                  </a:lnTo>
+                  <a:lnTo>
+                    <a:pt x="6660894" y="527457"/>
+                  </a:lnTo>
+                  <a:lnTo>
+                    <a:pt x="6732517" y="445587"/>
+                  </a:lnTo>
+                  <a:lnTo>
+                    <a:pt x="6804139" y="361391"/>
+                  </a:lnTo>
+                  <a:lnTo>
+                    <a:pt x="6875762" y="274803"/>
+                  </a:lnTo>
+                  <a:lnTo>
+                    <a:pt x="6947385" y="185755"/>
+                  </a:lnTo>
+                  <a:lnTo>
+                    <a:pt x="7019007" y="94178"/>
                   </a:lnTo>
                   <a:lnTo>
                     <a:pt x="7090630" y="0"/>
                   </a:lnTo>
                   <a:lnTo>
-                    <a:pt x="7090630" y="3021597"/>
-                  </a:lnTo>
-                  <a:lnTo>
-                    <a:pt x="7019007" y="3015856"/>
-                  </a:lnTo>
-                  <a:lnTo>
-                    <a:pt x="6947385" y="3010035"/>
-                  </a:lnTo>
-                  <a:lnTo>
-                    <a:pt x="6875762" y="3004133"/>
-                  </a:lnTo>
-                  <a:lnTo>
-                    <a:pt x="6804139" y="2998147"/>
-                  </a:lnTo>
-                  <a:lnTo>
-                    <a:pt x="6732517" y="2992078"/>
-                  </a:lnTo>
-                  <a:lnTo>
-                    <a:pt x="6660894" y="2985924"/>
-                  </a:lnTo>
-                  <a:lnTo>
-                    <a:pt x="6589272" y="2979684"/>
-                  </a:lnTo>
-                  <a:lnTo>
-                    <a:pt x="6517649" y="2973356"/>
-                  </a:lnTo>
-                  <a:lnTo>
-                    <a:pt x="6446027" y="2966940"/>
-                  </a:lnTo>
-                  <a:lnTo>
-                    <a:pt x="6374404" y="2960434"/>
-                  </a:lnTo>
-                  <a:lnTo>
-                    <a:pt x="6302782" y="2953837"/>
-                  </a:lnTo>
-                  <a:lnTo>
-                    <a:pt x="6231159" y="2947147"/>
-                  </a:lnTo>
-                  <a:lnTo>
-                    <a:pt x="6159537" y="2940364"/>
-                  </a:lnTo>
-                  <a:lnTo>
-                    <a:pt x="6087914" y="2933485"/>
-                  </a:lnTo>
-                  <a:lnTo>
-                    <a:pt x="6016292" y="2926511"/>
-                  </a:lnTo>
-                  <a:lnTo>
-                    <a:pt x="5944669" y="2919438"/>
-                  </a:lnTo>
-                  <a:lnTo>
-                    <a:pt x="5873047" y="2912267"/>
-                  </a:lnTo>
-                  <a:lnTo>
-                    <a:pt x="5801424" y="2904995"/>
-                  </a:lnTo>
-                  <a:lnTo>
-                    <a:pt x="5729802" y="2897621"/>
-                  </a:lnTo>
-                  <a:lnTo>
-                    <a:pt x="5658179" y="2890144"/>
-                  </a:lnTo>
-                  <a:lnTo>
-                    <a:pt x="5586557" y="2882563"/>
-                  </a:lnTo>
-                  <a:lnTo>
-                    <a:pt x="5514934" y="2874875"/>
-                  </a:lnTo>
-                  <a:lnTo>
-                    <a:pt x="5443311" y="2867079"/>
-                  </a:lnTo>
-                  <a:lnTo>
-                    <a:pt x="5371689" y="2859175"/>
-                  </a:lnTo>
-                  <a:lnTo>
-                    <a:pt x="5300066" y="2851159"/>
-                  </a:lnTo>
-                  <a:lnTo>
-                    <a:pt x="5228444" y="2843032"/>
-                  </a:lnTo>
-                  <a:lnTo>
-                    <a:pt x="5156821" y="2834790"/>
-                  </a:lnTo>
-                  <a:lnTo>
-                    <a:pt x="5085199" y="2826433"/>
-                  </a:lnTo>
-                  <a:lnTo>
-                    <a:pt x="5013576" y="2817959"/>
-                  </a:lnTo>
-                  <a:lnTo>
-                    <a:pt x="4941954" y="2809367"/>
-                  </a:lnTo>
-                  <a:lnTo>
-                    <a:pt x="4870331" y="2800654"/>
-                  </a:lnTo>
-                  <a:lnTo>
-                    <a:pt x="4798709" y="2791819"/>
-                  </a:lnTo>
-                  <a:lnTo>
-                    <a:pt x="4727086" y="2782860"/>
-                  </a:lnTo>
-                  <a:lnTo>
-                    <a:pt x="4655464" y="2773776"/>
-                  </a:lnTo>
-                  <a:lnTo>
-                    <a:pt x="4583841" y="2764565"/>
-                  </a:lnTo>
-                  <a:lnTo>
-                    <a:pt x="4512219" y="2755224"/>
-                  </a:lnTo>
-                  <a:lnTo>
-                    <a:pt x="4440596" y="2745753"/>
-                  </a:lnTo>
-                  <a:lnTo>
-                    <a:pt x="4368974" y="2736149"/>
-                  </a:lnTo>
-                  <a:lnTo>
-                    <a:pt x="4297351" y="2726411"/>
-                  </a:lnTo>
-                  <a:lnTo>
-                    <a:pt x="4225729" y="2716536"/>
-                  </a:lnTo>
-                  <a:lnTo>
-                    <a:pt x="4154106" y="2706523"/>
-                  </a:lnTo>
-                  <a:lnTo>
-                    <a:pt x="4082483" y="2696370"/>
-                  </a:lnTo>
-                  <a:lnTo>
-                    <a:pt x="4010861" y="2686074"/>
-                  </a:lnTo>
-                  <a:lnTo>
-                    <a:pt x="3939238" y="2675635"/>
-                  </a:lnTo>
-                  <a:lnTo>
-                    <a:pt x="3867616" y="2665049"/>
-                  </a:lnTo>
-                  <a:lnTo>
-                    <a:pt x="3795993" y="2654315"/>
-                  </a:lnTo>
-                  <a:lnTo>
-                    <a:pt x="3724371" y="2643430"/>
-                  </a:lnTo>
-                  <a:lnTo>
-                    <a:pt x="3652748" y="2632393"/>
-                  </a:lnTo>
-                  <a:lnTo>
-                    <a:pt x="3581126" y="2621202"/>
-                  </a:lnTo>
-                  <a:lnTo>
-                    <a:pt x="3509503" y="2609854"/>
-                  </a:lnTo>
-                  <a:lnTo>
-                    <a:pt x="3437881" y="2609421"/>
-                  </a:lnTo>
-                  <a:lnTo>
-                    <a:pt x="3366258" y="2632134"/>
-                  </a:lnTo>
-                  <a:lnTo>
-                    <a:pt x="3294636" y="2654220"/>
-                  </a:lnTo>
-                  <a:lnTo>
-                    <a:pt x="3223013" y="2675695"/>
-                  </a:lnTo>
-                  <a:lnTo>
-                    <a:pt x="3151391" y="2696577"/>
-                  </a:lnTo>
-                  <a:lnTo>
-                    <a:pt x="3079768" y="2716883"/>
-                  </a:lnTo>
-                  <a:lnTo>
-                    <a:pt x="3008146" y="2736627"/>
-                  </a:lnTo>
-                  <a:lnTo>
-                    <a:pt x="2936523" y="2755826"/>
-                  </a:lnTo>
-                  <a:lnTo>
-                    <a:pt x="2864901" y="2774494"/>
-                  </a:lnTo>
-                  <a:lnTo>
-                    <a:pt x="2793278" y="2792646"/>
-                  </a:lnTo>
-                  <a:lnTo>
-                    <a:pt x="2721655" y="2810297"/>
-                  </a:lnTo>
-                  <a:lnTo>
-                    <a:pt x="2650033" y="2827461"/>
-                  </a:lnTo>
-                  <a:lnTo>
-                    <a:pt x="2578410" y="2844150"/>
-                  </a:lnTo>
-                  <a:lnTo>
-                    <a:pt x="2506788" y="2860378"/>
-                  </a:lnTo>
-                  <a:lnTo>
-                    <a:pt x="2435165" y="2876157"/>
-                  </a:lnTo>
-                  <a:lnTo>
-                    <a:pt x="2363543" y="2891501"/>
-                  </a:lnTo>
-                  <a:lnTo>
-                    <a:pt x="2291920" y="2906420"/>
-                  </a:lnTo>
-                  <a:lnTo>
-                    <a:pt x="2220298" y="2920928"/>
-                  </a:lnTo>
-                  <a:lnTo>
-                    <a:pt x="2148675" y="2935035"/>
-                  </a:lnTo>
-                  <a:lnTo>
-                    <a:pt x="2077053" y="2948751"/>
-                  </a:lnTo>
-                  <a:lnTo>
-                    <a:pt x="2005430" y="2962089"/>
-                  </a:lnTo>
-                  <a:lnTo>
-                    <a:pt x="1933808" y="2975059"/>
-                  </a:lnTo>
-                  <a:lnTo>
-                    <a:pt x="1862185" y="2987670"/>
-                  </a:lnTo>
-                  <a:lnTo>
-                    <a:pt x="1790563" y="2999932"/>
-                  </a:lnTo>
-                  <a:lnTo>
-                    <a:pt x="1718940" y="3011856"/>
-                  </a:lnTo>
-                  <a:lnTo>
-                    <a:pt x="1647318" y="3023451"/>
-                  </a:lnTo>
-                  <a:lnTo>
-                    <a:pt x="1575695" y="3034725"/>
-                  </a:lnTo>
-                  <a:lnTo>
-                    <a:pt x="1504073" y="3045687"/>
-                  </a:lnTo>
-                  <a:lnTo>
-                    <a:pt x="1432450" y="3056347"/>
-                  </a:lnTo>
-                  <a:lnTo>
-                    <a:pt x="1360827" y="3066712"/>
-                  </a:lnTo>
-                  <a:lnTo>
-                    <a:pt x="1289205" y="3076791"/>
-                  </a:lnTo>
-                  <a:lnTo>
-                    <a:pt x="1217582" y="3086591"/>
-                  </a:lnTo>
-                  <a:lnTo>
-                    <a:pt x="1145960" y="3096121"/>
-                  </a:lnTo>
-                  <a:lnTo>
-                    <a:pt x="1074337" y="3105387"/>
-                  </a:lnTo>
-                  <a:lnTo>
-                    <a:pt x="1002715" y="3114397"/>
-                  </a:lnTo>
-                  <a:lnTo>
-                    <a:pt x="931092" y="3123158"/>
-                  </a:lnTo>
-                  <a:lnTo>
-                    <a:pt x="859470" y="3131678"/>
-                  </a:lnTo>
-                  <a:lnTo>
-                    <a:pt x="787847" y="3139961"/>
-                  </a:lnTo>
-                  <a:lnTo>
-                    <a:pt x="716225" y="3148016"/>
-                  </a:lnTo>
-                  <a:lnTo>
-                    <a:pt x="644602" y="3155849"/>
-                  </a:lnTo>
-                  <a:lnTo>
-                    <a:pt x="572980" y="3163465"/>
-                  </a:lnTo>
-                  <a:lnTo>
-                    <a:pt x="501357" y="3170870"/>
-                  </a:lnTo>
-                  <a:lnTo>
-                    <a:pt x="429735" y="3178071"/>
-                  </a:lnTo>
-                  <a:lnTo>
-                    <a:pt x="358112" y="3185073"/>
-                  </a:lnTo>
-                  <a:lnTo>
-                    <a:pt x="286490" y="3191882"/>
-                  </a:lnTo>
-                  <a:lnTo>
-                    <a:pt x="214867" y="3198502"/>
-                  </a:lnTo>
-                  <a:lnTo>
-                    <a:pt x="143245" y="3204940"/>
-                  </a:lnTo>
-                  <a:lnTo>
-                    <a:pt x="71622" y="3211199"/>
-                  </a:lnTo>
-                  <a:lnTo>
-                    <a:pt x="0" y="3217286"/>
+                    <a:pt x="7090630" y="2997612"/>
+                  </a:lnTo>
+                  <a:lnTo>
+                    <a:pt x="7019007" y="2991857"/>
+                  </a:lnTo>
+                  <a:lnTo>
+                    <a:pt x="6947385" y="2986022"/>
+                  </a:lnTo>
+                  <a:lnTo>
+                    <a:pt x="6875762" y="2980106"/>
+                  </a:lnTo>
+                  <a:lnTo>
+                    <a:pt x="6804139" y="2974107"/>
+                  </a:lnTo>
+                  <a:lnTo>
+                    <a:pt x="6732517" y="2968024"/>
+                  </a:lnTo>
+                  <a:lnTo>
+                    <a:pt x="6660894" y="2961857"/>
+                  </a:lnTo>
+                  <a:lnTo>
+                    <a:pt x="6589272" y="2955603"/>
+                  </a:lnTo>
+                  <a:lnTo>
+                    <a:pt x="6517649" y="2949261"/>
+                  </a:lnTo>
+                  <a:lnTo>
+                    <a:pt x="6446027" y="2942831"/>
+                  </a:lnTo>
+                  <a:lnTo>
+                    <a:pt x="6374404" y="2936311"/>
+                  </a:lnTo>
+                  <a:lnTo>
+                    <a:pt x="6302782" y="2929701"/>
+                  </a:lnTo>
+                  <a:lnTo>
+                    <a:pt x="6231159" y="2922997"/>
+                  </a:lnTo>
+                  <a:lnTo>
+                    <a:pt x="6159537" y="2916200"/>
+                  </a:lnTo>
+                  <a:lnTo>
+                    <a:pt x="6087914" y="2909308"/>
+                  </a:lnTo>
+                  <a:lnTo>
+                    <a:pt x="6016292" y="2902320"/>
+                  </a:lnTo>
+                  <a:lnTo>
+                    <a:pt x="5944669" y="2895234"/>
+                  </a:lnTo>
+                  <a:lnTo>
+                    <a:pt x="5873047" y="2888049"/>
+                  </a:lnTo>
+                  <a:lnTo>
+                    <a:pt x="5801424" y="2880764"/>
+                  </a:lnTo>
+                  <a:lnTo>
+                    <a:pt x="5729802" y="2873377"/>
+                  </a:lnTo>
+                  <a:lnTo>
+                    <a:pt x="5658179" y="2865886"/>
+                  </a:lnTo>
+                  <a:lnTo>
+                    <a:pt x="5586557" y="2858291"/>
+                  </a:lnTo>
+                  <a:lnTo>
+                    <a:pt x="5514934" y="2850590"/>
+                  </a:lnTo>
+                  <a:lnTo>
+                    <a:pt x="5443311" y="2842781"/>
+                  </a:lnTo>
+                  <a:lnTo>
+                    <a:pt x="5371689" y="2834863"/>
+                  </a:lnTo>
+                  <a:lnTo>
+                    <a:pt x="5300066" y="2826835"/>
+                  </a:lnTo>
+                  <a:lnTo>
+                    <a:pt x="5228444" y="2818694"/>
+                  </a:lnTo>
+                  <a:lnTo>
+                    <a:pt x="5156821" y="2810439"/>
+                  </a:lnTo>
+                  <a:lnTo>
+                    <a:pt x="5085199" y="2802070"/>
+                  </a:lnTo>
+                  <a:lnTo>
+                    <a:pt x="5013576" y="2793583"/>
+                  </a:lnTo>
+                  <a:lnTo>
+                    <a:pt x="4941954" y="2784977"/>
+                  </a:lnTo>
+                  <a:lnTo>
+                    <a:pt x="4870331" y="2776252"/>
+                  </a:lnTo>
+                  <a:lnTo>
+                    <a:pt x="4798709" y="2767404"/>
+                  </a:lnTo>
+                  <a:lnTo>
+                    <a:pt x="4727086" y="2758433"/>
+                  </a:lnTo>
+                  <a:lnTo>
+                    <a:pt x="4655464" y="2749336"/>
+                  </a:lnTo>
+                  <a:lnTo>
+                    <a:pt x="4583841" y="2740113"/>
+                  </a:lnTo>
+                  <a:lnTo>
+                    <a:pt x="4512219" y="2730760"/>
+                  </a:lnTo>
+                  <a:lnTo>
+                    <a:pt x="4440596" y="2721277"/>
+                  </a:lnTo>
+                  <a:lnTo>
+                    <a:pt x="4368974" y="2711661"/>
+                  </a:lnTo>
+                  <a:lnTo>
+                    <a:pt x="4297351" y="2701911"/>
+                  </a:lnTo>
+                  <a:lnTo>
+                    <a:pt x="4225729" y="2692024"/>
+                  </a:lnTo>
+                  <a:lnTo>
+                    <a:pt x="4154106" y="2682000"/>
+                  </a:lnTo>
+                  <a:lnTo>
+                    <a:pt x="4082483" y="2671835"/>
+                  </a:lnTo>
+                  <a:lnTo>
+                    <a:pt x="4010861" y="2661528"/>
+                  </a:lnTo>
+                  <a:lnTo>
+                    <a:pt x="3939238" y="2651078"/>
+                  </a:lnTo>
+                  <a:lnTo>
+                    <a:pt x="3867616" y="2640481"/>
+                  </a:lnTo>
+                  <a:lnTo>
+                    <a:pt x="3795993" y="2629736"/>
+                  </a:lnTo>
+                  <a:lnTo>
+                    <a:pt x="3724371" y="2618841"/>
+                  </a:lnTo>
+                  <a:lnTo>
+                    <a:pt x="3652748" y="2607794"/>
+                  </a:lnTo>
+                  <a:lnTo>
+                    <a:pt x="3581126" y="2596592"/>
+                  </a:lnTo>
+                  <a:lnTo>
+                    <a:pt x="3509503" y="2585234"/>
+                  </a:lnTo>
+                  <a:lnTo>
+                    <a:pt x="3437881" y="2592367"/>
+                  </a:lnTo>
+                  <a:lnTo>
+                    <a:pt x="3366258" y="2614937"/>
+                  </a:lnTo>
+                  <a:lnTo>
+                    <a:pt x="3294636" y="2636883"/>
+                  </a:lnTo>
+                  <a:lnTo>
+                    <a:pt x="3223013" y="2658222"/>
+                  </a:lnTo>
+                  <a:lnTo>
+                    <a:pt x="3151391" y="2678972"/>
+                  </a:lnTo>
+                  <a:lnTo>
+                    <a:pt x="3079768" y="2699149"/>
+                  </a:lnTo>
+                  <a:lnTo>
+                    <a:pt x="3008146" y="2718769"/>
+                  </a:lnTo>
+                  <a:lnTo>
+                    <a:pt x="2936523" y="2737846"/>
+                  </a:lnTo>
+                  <a:lnTo>
+                    <a:pt x="2864901" y="2756397"/>
+                  </a:lnTo>
+                  <a:lnTo>
+                    <a:pt x="2793278" y="2774435"/>
+                  </a:lnTo>
+                  <a:lnTo>
+                    <a:pt x="2721655" y="2791975"/>
+                  </a:lnTo>
+                  <a:lnTo>
+                    <a:pt x="2650033" y="2809031"/>
+                  </a:lnTo>
+                  <a:lnTo>
+                    <a:pt x="2578410" y="2825615"/>
+                  </a:lnTo>
+                  <a:lnTo>
+                    <a:pt x="2506788" y="2841741"/>
+                  </a:lnTo>
+                  <a:lnTo>
+                    <a:pt x="2435165" y="2857422"/>
+                  </a:lnTo>
+                  <a:lnTo>
+                    <a:pt x="2363543" y="2872669"/>
+                  </a:lnTo>
+                  <a:lnTo>
+                    <a:pt x="2291920" y="2887496"/>
+                  </a:lnTo>
+                  <a:lnTo>
+                    <a:pt x="2220298" y="2901913"/>
+                  </a:lnTo>
+                  <a:lnTo>
+                    <a:pt x="2148675" y="2915931"/>
+                  </a:lnTo>
+                  <a:lnTo>
+                    <a:pt x="2077053" y="2929563"/>
+                  </a:lnTo>
+                  <a:lnTo>
+                    <a:pt x="2005430" y="2942817"/>
+                  </a:lnTo>
+                  <a:lnTo>
+                    <a:pt x="1933808" y="2955706"/>
+                  </a:lnTo>
+                  <a:lnTo>
+                    <a:pt x="1862185" y="2968239"/>
+                  </a:lnTo>
+                  <a:lnTo>
+                    <a:pt x="1790563" y="2980425"/>
+                  </a:lnTo>
+                  <a:lnTo>
+                    <a:pt x="1718940" y="2992275"/>
+                  </a:lnTo>
+                  <a:lnTo>
+                    <a:pt x="1647318" y="3003797"/>
+                  </a:lnTo>
+                  <a:lnTo>
+                    <a:pt x="1575695" y="3015002"/>
+                  </a:lnTo>
+                  <a:lnTo>
+                    <a:pt x="1504073" y="3025896"/>
+                  </a:lnTo>
+                  <a:lnTo>
+                    <a:pt x="1432450" y="3036490"/>
+                  </a:lnTo>
+                  <a:lnTo>
+                    <a:pt x="1360827" y="3046791"/>
+                  </a:lnTo>
+                  <a:lnTo>
+                    <a:pt x="1289205" y="3056808"/>
+                  </a:lnTo>
+                  <a:lnTo>
+                    <a:pt x="1217582" y="3066548"/>
+                  </a:lnTo>
+                  <a:lnTo>
+                    <a:pt x="1145960" y="3076019"/>
+                  </a:lnTo>
+                  <a:lnTo>
+                    <a:pt x="1074337" y="3085228"/>
+                  </a:lnTo>
+                  <a:lnTo>
+                    <a:pt x="1002715" y="3094183"/>
+                  </a:lnTo>
+                  <a:lnTo>
+                    <a:pt x="931092" y="3102890"/>
+                  </a:lnTo>
+                  <a:lnTo>
+                    <a:pt x="859470" y="3111357"/>
+                  </a:lnTo>
+                  <a:lnTo>
+                    <a:pt x="787847" y="3119590"/>
+                  </a:lnTo>
+                  <a:lnTo>
+                    <a:pt x="716225" y="3127596"/>
+                  </a:lnTo>
+                  <a:lnTo>
+                    <a:pt x="644602" y="3135380"/>
+                  </a:lnTo>
+                  <a:lnTo>
+                    <a:pt x="572980" y="3142950"/>
+                  </a:lnTo>
+                  <a:lnTo>
+                    <a:pt x="501357" y="3150310"/>
+                  </a:lnTo>
+                  <a:lnTo>
+                    <a:pt x="429735" y="3157467"/>
+                  </a:lnTo>
+                  <a:lnTo>
+                    <a:pt x="358112" y="3164427"/>
+                  </a:lnTo>
+                  <a:lnTo>
+                    <a:pt x="286490" y="3171194"/>
+                  </a:lnTo>
+                  <a:lnTo>
+                    <a:pt x="214867" y="3177774"/>
+                  </a:lnTo>
+                  <a:lnTo>
+                    <a:pt x="143245" y="3184172"/>
+                  </a:lnTo>
+                  <a:lnTo>
+                    <a:pt x="71622" y="3190394"/>
+                  </a:lnTo>
+                  <a:lnTo>
+                    <a:pt x="0" y="3196444"/>
                   </a:lnTo>
                   <a:close/>
                 </a:path>
@@ -4020,309 +4020,309 @@
           </p:nvSpPr>
           <p:spPr>
             <a:xfrm>
-              <a:off x="1172049" y="2125749"/>
-              <a:ext cx="7090630" cy="2598347"/>
+              <a:off x="1172049" y="2147843"/>
+              <a:ext cx="7090630" cy="2573717"/>
             </a:xfrm>
             <a:custGeom>
               <a:avLst/>
               <a:pathLst>
-                <a:path w="7090630" h="2598347">
+                <a:path w="7090630" h="2573717">
                   <a:moveTo>
-                    <a:pt x="0" y="1807266"/>
+                    <a:pt x="0" y="1782628"/>
                   </a:moveTo>
                   <a:lnTo>
-                    <a:pt x="71622" y="1829699"/>
-                  </a:lnTo>
-                  <a:lnTo>
-                    <a:pt x="143245" y="1851822"/>
-                  </a:lnTo>
-                  <a:lnTo>
-                    <a:pt x="214867" y="1873640"/>
-                  </a:lnTo>
-                  <a:lnTo>
-                    <a:pt x="286490" y="1895157"/>
-                  </a:lnTo>
-                  <a:lnTo>
-                    <a:pt x="358112" y="1916376"/>
-                  </a:lnTo>
-                  <a:lnTo>
-                    <a:pt x="429735" y="1937302"/>
-                  </a:lnTo>
-                  <a:lnTo>
-                    <a:pt x="501357" y="1957939"/>
-                  </a:lnTo>
-                  <a:lnTo>
-                    <a:pt x="572980" y="1978291"/>
-                  </a:lnTo>
-                  <a:lnTo>
-                    <a:pt x="644602" y="1998362"/>
-                  </a:lnTo>
-                  <a:lnTo>
-                    <a:pt x="716225" y="2018156"/>
-                  </a:lnTo>
-                  <a:lnTo>
-                    <a:pt x="787847" y="2037677"/>
-                  </a:lnTo>
-                  <a:lnTo>
-                    <a:pt x="859470" y="2056927"/>
-                  </a:lnTo>
-                  <a:lnTo>
-                    <a:pt x="931092" y="2075912"/>
-                  </a:lnTo>
-                  <a:lnTo>
-                    <a:pt x="1002715" y="2094635"/>
-                  </a:lnTo>
-                  <a:lnTo>
-                    <a:pt x="1074337" y="2113099"/>
-                  </a:lnTo>
-                  <a:lnTo>
-                    <a:pt x="1145960" y="2131308"/>
-                  </a:lnTo>
-                  <a:lnTo>
-                    <a:pt x="1217582" y="2149266"/>
-                  </a:lnTo>
-                  <a:lnTo>
-                    <a:pt x="1289205" y="2166976"/>
-                  </a:lnTo>
-                  <a:lnTo>
-                    <a:pt x="1360827" y="2184441"/>
-                  </a:lnTo>
-                  <a:lnTo>
-                    <a:pt x="1432450" y="2201664"/>
-                  </a:lnTo>
-                  <a:lnTo>
-                    <a:pt x="1504073" y="2218650"/>
-                  </a:lnTo>
-                  <a:lnTo>
-                    <a:pt x="1575695" y="2235402"/>
-                  </a:lnTo>
-                  <a:lnTo>
-                    <a:pt x="1647318" y="2251921"/>
-                  </a:lnTo>
-                  <a:lnTo>
-                    <a:pt x="1718940" y="2268213"/>
-                  </a:lnTo>
-                  <a:lnTo>
-                    <a:pt x="1790563" y="2284280"/>
-                  </a:lnTo>
-                  <a:lnTo>
-                    <a:pt x="1862185" y="2300125"/>
-                  </a:lnTo>
-                  <a:lnTo>
-                    <a:pt x="1933808" y="2315751"/>
-                  </a:lnTo>
-                  <a:lnTo>
-                    <a:pt x="2005430" y="2331161"/>
-                  </a:lnTo>
-                  <a:lnTo>
-                    <a:pt x="2077053" y="2346358"/>
-                  </a:lnTo>
-                  <a:lnTo>
-                    <a:pt x="2148675" y="2361346"/>
-                  </a:lnTo>
-                  <a:lnTo>
-                    <a:pt x="2220298" y="2376126"/>
-                  </a:lnTo>
-                  <a:lnTo>
-                    <a:pt x="2291920" y="2390703"/>
-                  </a:lnTo>
-                  <a:lnTo>
-                    <a:pt x="2363543" y="2405078"/>
-                  </a:lnTo>
-                  <a:lnTo>
-                    <a:pt x="2435165" y="2419254"/>
-                  </a:lnTo>
-                  <a:lnTo>
-                    <a:pt x="2506788" y="2433235"/>
-                  </a:lnTo>
-                  <a:lnTo>
-                    <a:pt x="2578410" y="2447022"/>
-                  </a:lnTo>
-                  <a:lnTo>
-                    <a:pt x="2650033" y="2460619"/>
-                  </a:lnTo>
-                  <a:lnTo>
-                    <a:pt x="2721655" y="2474029"/>
-                  </a:lnTo>
-                  <a:lnTo>
-                    <a:pt x="2793278" y="2487253"/>
-                  </a:lnTo>
-                  <a:lnTo>
-                    <a:pt x="2864901" y="2500294"/>
-                  </a:lnTo>
-                  <a:lnTo>
-                    <a:pt x="2936523" y="2513156"/>
-                  </a:lnTo>
-                  <a:lnTo>
-                    <a:pt x="3008146" y="2525839"/>
-                  </a:lnTo>
-                  <a:lnTo>
-                    <a:pt x="3079768" y="2538348"/>
-                  </a:lnTo>
-                  <a:lnTo>
-                    <a:pt x="3151391" y="2550684"/>
-                  </a:lnTo>
-                  <a:lnTo>
-                    <a:pt x="3223013" y="2562849"/>
-                  </a:lnTo>
-                  <a:lnTo>
-                    <a:pt x="3294636" y="2574847"/>
-                  </a:lnTo>
-                  <a:lnTo>
-                    <a:pt x="3366258" y="2586678"/>
-                  </a:lnTo>
-                  <a:lnTo>
-                    <a:pt x="3437881" y="2598347"/>
-                  </a:lnTo>
-                  <a:lnTo>
-                    <a:pt x="3509503" y="2586062"/>
-                  </a:lnTo>
-                  <a:lnTo>
-                    <a:pt x="3581126" y="2562039"/>
-                  </a:lnTo>
-                  <a:lnTo>
-                    <a:pt x="3652748" y="2537334"/>
-                  </a:lnTo>
-                  <a:lnTo>
-                    <a:pt x="3724371" y="2511927"/>
-                  </a:lnTo>
-                  <a:lnTo>
-                    <a:pt x="3795993" y="2485799"/>
-                  </a:lnTo>
-                  <a:lnTo>
-                    <a:pt x="3867616" y="2458927"/>
-                  </a:lnTo>
-                  <a:lnTo>
-                    <a:pt x="3939238" y="2431292"/>
-                  </a:lnTo>
-                  <a:lnTo>
-                    <a:pt x="4010861" y="2402872"/>
-                  </a:lnTo>
-                  <a:lnTo>
-                    <a:pt x="4082483" y="2373645"/>
-                  </a:lnTo>
-                  <a:lnTo>
-                    <a:pt x="4154106" y="2343587"/>
-                  </a:lnTo>
-                  <a:lnTo>
-                    <a:pt x="4225729" y="2312675"/>
-                  </a:lnTo>
-                  <a:lnTo>
-                    <a:pt x="4297351" y="2280884"/>
-                  </a:lnTo>
-                  <a:lnTo>
-                    <a:pt x="4368974" y="2248190"/>
-                  </a:lnTo>
-                  <a:lnTo>
-                    <a:pt x="4440596" y="2214568"/>
-                  </a:lnTo>
-                  <a:lnTo>
-                    <a:pt x="4512219" y="2179990"/>
-                  </a:lnTo>
-                  <a:lnTo>
-                    <a:pt x="4583841" y="2144429"/>
-                  </a:lnTo>
-                  <a:lnTo>
-                    <a:pt x="4655464" y="2107858"/>
-                  </a:lnTo>
-                  <a:lnTo>
-                    <a:pt x="4727086" y="2070248"/>
-                  </a:lnTo>
-                  <a:lnTo>
-                    <a:pt x="4798709" y="2031569"/>
-                  </a:lnTo>
-                  <a:lnTo>
-                    <a:pt x="4870331" y="1991791"/>
-                  </a:lnTo>
-                  <a:lnTo>
-                    <a:pt x="4941954" y="1950883"/>
-                  </a:lnTo>
-                  <a:lnTo>
-                    <a:pt x="5013576" y="1908813"/>
-                  </a:lnTo>
-                  <a:lnTo>
-                    <a:pt x="5085199" y="1865547"/>
-                  </a:lnTo>
-                  <a:lnTo>
-                    <a:pt x="5156821" y="1821051"/>
-                  </a:lnTo>
-                  <a:lnTo>
-                    <a:pt x="5228444" y="1775292"/>
-                  </a:lnTo>
-                  <a:lnTo>
-                    <a:pt x="5300066" y="1728232"/>
-                  </a:lnTo>
-                  <a:lnTo>
-                    <a:pt x="5371689" y="1679835"/>
-                  </a:lnTo>
-                  <a:lnTo>
-                    <a:pt x="5443311" y="1630063"/>
-                  </a:lnTo>
-                  <a:lnTo>
-                    <a:pt x="5514934" y="1578877"/>
-                  </a:lnTo>
-                  <a:lnTo>
-                    <a:pt x="5586557" y="1526236"/>
-                  </a:lnTo>
-                  <a:lnTo>
-                    <a:pt x="5658179" y="1472100"/>
-                  </a:lnTo>
-                  <a:lnTo>
-                    <a:pt x="5729802" y="1416425"/>
-                  </a:lnTo>
-                  <a:lnTo>
-                    <a:pt x="5801424" y="1359168"/>
-                  </a:lnTo>
-                  <a:lnTo>
-                    <a:pt x="5873047" y="1300285"/>
-                  </a:lnTo>
-                  <a:lnTo>
-                    <a:pt x="5944669" y="1239728"/>
-                  </a:lnTo>
-                  <a:lnTo>
-                    <a:pt x="6016292" y="1177451"/>
-                  </a:lnTo>
-                  <a:lnTo>
-                    <a:pt x="6087914" y="1113404"/>
-                  </a:lnTo>
-                  <a:lnTo>
-                    <a:pt x="6159537" y="1047537"/>
-                  </a:lnTo>
-                  <a:lnTo>
-                    <a:pt x="6231159" y="979799"/>
-                  </a:lnTo>
-                  <a:lnTo>
-                    <a:pt x="6302782" y="910136"/>
-                  </a:lnTo>
-                  <a:lnTo>
-                    <a:pt x="6374404" y="838493"/>
-                  </a:lnTo>
-                  <a:lnTo>
-                    <a:pt x="6446027" y="764815"/>
-                  </a:lnTo>
-                  <a:lnTo>
-                    <a:pt x="6517649" y="689044"/>
-                  </a:lnTo>
-                  <a:lnTo>
-                    <a:pt x="6589272" y="611119"/>
-                  </a:lnTo>
-                  <a:lnTo>
-                    <a:pt x="6660894" y="530980"/>
-                  </a:lnTo>
-                  <a:lnTo>
-                    <a:pt x="6732517" y="448565"/>
-                  </a:lnTo>
-                  <a:lnTo>
-                    <a:pt x="6804139" y="363807"/>
-                  </a:lnTo>
-                  <a:lnTo>
-                    <a:pt x="6875762" y="276641"/>
-                  </a:lnTo>
-                  <a:lnTo>
-                    <a:pt x="6947385" y="186999"/>
-                  </a:lnTo>
-                  <a:lnTo>
-                    <a:pt x="7019007" y="94809"/>
+                    <a:pt x="71622" y="1805047"/>
+                  </a:lnTo>
+                  <a:lnTo>
+                    <a:pt x="143245" y="1827157"/>
+                  </a:lnTo>
+                  <a:lnTo>
+                    <a:pt x="214867" y="1848963"/>
+                  </a:lnTo>
+                  <a:lnTo>
+                    <a:pt x="286490" y="1870468"/>
+                  </a:lnTo>
+                  <a:lnTo>
+                    <a:pt x="358112" y="1891676"/>
+                  </a:lnTo>
+                  <a:lnTo>
+                    <a:pt x="429735" y="1912592"/>
+                  </a:lnTo>
+                  <a:lnTo>
+                    <a:pt x="501357" y="1933220"/>
+                  </a:lnTo>
+                  <a:lnTo>
+                    <a:pt x="572980" y="1953564"/>
+                  </a:lnTo>
+                  <a:lnTo>
+                    <a:pt x="644602" y="1973627"/>
+                  </a:lnTo>
+                  <a:lnTo>
+                    <a:pt x="716225" y="1993414"/>
+                  </a:lnTo>
+                  <a:lnTo>
+                    <a:pt x="787847" y="2012928"/>
+                  </a:lnTo>
+                  <a:lnTo>
+                    <a:pt x="859470" y="2032173"/>
+                  </a:lnTo>
+                  <a:lnTo>
+                    <a:pt x="931092" y="2051153"/>
+                  </a:lnTo>
+                  <a:lnTo>
+                    <a:pt x="1002715" y="2069872"/>
+                  </a:lnTo>
+                  <a:lnTo>
+                    <a:pt x="1074337" y="2088332"/>
+                  </a:lnTo>
+                  <a:lnTo>
+                    <a:pt x="1145960" y="2106538"/>
+                  </a:lnTo>
+                  <a:lnTo>
+                    <a:pt x="1217582" y="2124494"/>
+                  </a:lnTo>
+                  <a:lnTo>
+                    <a:pt x="1289205" y="2142201"/>
+                  </a:lnTo>
+                  <a:lnTo>
+                    <a:pt x="1360827" y="2159665"/>
+                  </a:lnTo>
+                  <a:lnTo>
+                    <a:pt x="1432450" y="2176888"/>
+                  </a:lnTo>
+                  <a:lnTo>
+                    <a:pt x="1504073" y="2193874"/>
+                  </a:lnTo>
+                  <a:lnTo>
+                    <a:pt x="1575695" y="2210625"/>
+                  </a:lnTo>
+                  <a:lnTo>
+                    <a:pt x="1647318" y="2227146"/>
+                  </a:lnTo>
+                  <a:lnTo>
+                    <a:pt x="1718940" y="2243439"/>
+                  </a:lnTo>
+                  <a:lnTo>
+                    <a:pt x="1790563" y="2259507"/>
+                  </a:lnTo>
+                  <a:lnTo>
+                    <a:pt x="1862185" y="2275354"/>
+                  </a:lnTo>
+                  <a:lnTo>
+                    <a:pt x="1933808" y="2290983"/>
+                  </a:lnTo>
+                  <a:lnTo>
+                    <a:pt x="2005430" y="2306396"/>
+                  </a:lnTo>
+                  <a:lnTo>
+                    <a:pt x="2077053" y="2321597"/>
+                  </a:lnTo>
+                  <a:lnTo>
+                    <a:pt x="2148675" y="2336588"/>
+                  </a:lnTo>
+                  <a:lnTo>
+                    <a:pt x="2220298" y="2351373"/>
+                  </a:lnTo>
+                  <a:lnTo>
+                    <a:pt x="2291920" y="2365954"/>
+                  </a:lnTo>
+                  <a:lnTo>
+                    <a:pt x="2363543" y="2380334"/>
+                  </a:lnTo>
+                  <a:lnTo>
+                    <a:pt x="2435165" y="2394516"/>
+                  </a:lnTo>
+                  <a:lnTo>
+                    <a:pt x="2506788" y="2408503"/>
+                  </a:lnTo>
+                  <a:lnTo>
+                    <a:pt x="2578410" y="2422296"/>
+                  </a:lnTo>
+                  <a:lnTo>
+                    <a:pt x="2650033" y="2435900"/>
+                  </a:lnTo>
+                  <a:lnTo>
+                    <a:pt x="2721655" y="2449316"/>
+                  </a:lnTo>
+                  <a:lnTo>
+                    <a:pt x="2793278" y="2462547"/>
+                  </a:lnTo>
+                  <a:lnTo>
+                    <a:pt x="2864901" y="2475596"/>
+                  </a:lnTo>
+                  <a:lnTo>
+                    <a:pt x="2936523" y="2488465"/>
+                  </a:lnTo>
+                  <a:lnTo>
+                    <a:pt x="3008146" y="2501157"/>
+                  </a:lnTo>
+                  <a:lnTo>
+                    <a:pt x="3079768" y="2513674"/>
+                  </a:lnTo>
+                  <a:lnTo>
+                    <a:pt x="3151391" y="2526018"/>
+                  </a:lnTo>
+                  <a:lnTo>
+                    <a:pt x="3223013" y="2538192"/>
+                  </a:lnTo>
+                  <a:lnTo>
+                    <a:pt x="3294636" y="2550199"/>
+                  </a:lnTo>
+                  <a:lnTo>
+                    <a:pt x="3366258" y="2562040"/>
+                  </a:lnTo>
+                  <a:lnTo>
+                    <a:pt x="3437881" y="2573717"/>
+                  </a:lnTo>
+                  <a:lnTo>
+                    <a:pt x="3509503" y="2569157"/>
+                  </a:lnTo>
+                  <a:lnTo>
+                    <a:pt x="3581126" y="2545287"/>
+                  </a:lnTo>
+                  <a:lnTo>
+                    <a:pt x="3652748" y="2520740"/>
+                  </a:lnTo>
+                  <a:lnTo>
+                    <a:pt x="3724371" y="2495494"/>
+                  </a:lnTo>
+                  <a:lnTo>
+                    <a:pt x="3795993" y="2469532"/>
+                  </a:lnTo>
+                  <a:lnTo>
+                    <a:pt x="3867616" y="2442832"/>
+                  </a:lnTo>
+                  <a:lnTo>
+                    <a:pt x="3939238" y="2415374"/>
+                  </a:lnTo>
+                  <a:lnTo>
+                    <a:pt x="4010861" y="2387135"/>
+                  </a:lnTo>
+                  <a:lnTo>
+                    <a:pt x="4082483" y="2358095"/>
+                  </a:lnTo>
+                  <a:lnTo>
+                    <a:pt x="4154106" y="2328229"/>
+                  </a:lnTo>
+                  <a:lnTo>
+                    <a:pt x="4225729" y="2297515"/>
+                  </a:lnTo>
+                  <a:lnTo>
+                    <a:pt x="4297351" y="2265929"/>
+                  </a:lnTo>
+                  <a:lnTo>
+                    <a:pt x="4368974" y="2233445"/>
+                  </a:lnTo>
+                  <a:lnTo>
+                    <a:pt x="4440596" y="2200038"/>
+                  </a:lnTo>
+                  <a:lnTo>
+                    <a:pt x="4512219" y="2165683"/>
+                  </a:lnTo>
+                  <a:lnTo>
+                    <a:pt x="4583841" y="2130351"/>
+                  </a:lnTo>
+                  <a:lnTo>
+                    <a:pt x="4655464" y="2094016"/>
+                  </a:lnTo>
+                  <a:lnTo>
+                    <a:pt x="4727086" y="2056648"/>
+                  </a:lnTo>
+                  <a:lnTo>
+                    <a:pt x="4798709" y="2018219"/>
+                  </a:lnTo>
+                  <a:lnTo>
+                    <a:pt x="4870331" y="1978698"/>
+                  </a:lnTo>
+                  <a:lnTo>
+                    <a:pt x="4941954" y="1938055"/>
+                  </a:lnTo>
+                  <a:lnTo>
+                    <a:pt x="5013576" y="1896257"/>
+                  </a:lnTo>
+                  <a:lnTo>
+                    <a:pt x="5085199" y="1853272"/>
+                  </a:lnTo>
+                  <a:lnTo>
+                    <a:pt x="5156821" y="1809065"/>
+                  </a:lnTo>
+                  <a:lnTo>
+                    <a:pt x="5228444" y="1763603"/>
+                  </a:lnTo>
+                  <a:lnTo>
+                    <a:pt x="5300066" y="1716849"/>
+                  </a:lnTo>
+                  <a:lnTo>
+                    <a:pt x="5371689" y="1668767"/>
+                  </a:lnTo>
+                  <a:lnTo>
+                    <a:pt x="5443311" y="1619319"/>
+                  </a:lnTo>
+                  <a:lnTo>
+                    <a:pt x="5514934" y="1568466"/>
+                  </a:lnTo>
+                  <a:lnTo>
+                    <a:pt x="5586557" y="1516169"/>
+                  </a:lnTo>
+                  <a:lnTo>
+                    <a:pt x="5658179" y="1462386"/>
+                  </a:lnTo>
+                  <a:lnTo>
+                    <a:pt x="5729802" y="1407075"/>
+                  </a:lnTo>
+                  <a:lnTo>
+                    <a:pt x="5801424" y="1350193"/>
+                  </a:lnTo>
+                  <a:lnTo>
+                    <a:pt x="5873047" y="1291695"/>
+                  </a:lnTo>
+                  <a:lnTo>
+                    <a:pt x="5944669" y="1231535"/>
+                  </a:lnTo>
+                  <a:lnTo>
+                    <a:pt x="6016292" y="1169666"/>
+                  </a:lnTo>
+                  <a:lnTo>
+                    <a:pt x="6087914" y="1106040"/>
+                  </a:lnTo>
+                  <a:lnTo>
+                    <a:pt x="6159537" y="1040606"/>
+                  </a:lnTo>
+                  <a:lnTo>
+                    <a:pt x="6231159" y="973313"/>
+                  </a:lnTo>
+                  <a:lnTo>
+                    <a:pt x="6302782" y="904109"/>
+                  </a:lnTo>
+                  <a:lnTo>
+                    <a:pt x="6374404" y="832939"/>
+                  </a:lnTo>
+                  <a:lnTo>
+                    <a:pt x="6446027" y="759747"/>
+                  </a:lnTo>
+                  <a:lnTo>
+                    <a:pt x="6517649" y="684475"/>
+                  </a:lnTo>
+                  <a:lnTo>
+                    <a:pt x="6589272" y="607066"/>
+                  </a:lnTo>
+                  <a:lnTo>
+                    <a:pt x="6660894" y="527457"/>
+                  </a:lnTo>
+                  <a:lnTo>
+                    <a:pt x="6732517" y="445587"/>
+                  </a:lnTo>
+                  <a:lnTo>
+                    <a:pt x="6804139" y="361391"/>
+                  </a:lnTo>
+                  <a:lnTo>
+                    <a:pt x="6875762" y="274803"/>
+                  </a:lnTo>
+                  <a:lnTo>
+                    <a:pt x="6947385" y="185755"/>
+                  </a:lnTo>
+                  <a:lnTo>
+                    <a:pt x="7019007" y="94178"/>
                   </a:lnTo>
                   <a:lnTo>
                     <a:pt x="7090630" y="0"/>
@@ -4345,312 +4345,312 @@
           </p:nvSpPr>
           <p:spPr>
             <a:xfrm>
-              <a:off x="1172049" y="4735170"/>
-              <a:ext cx="7090630" cy="607865"/>
+              <a:off x="1172049" y="4733078"/>
+              <a:ext cx="7090630" cy="611209"/>
             </a:xfrm>
             <a:custGeom>
               <a:avLst/>
               <a:pathLst>
-                <a:path w="7090630" h="607865">
+                <a:path w="7090630" h="611209">
                   <a:moveTo>
-                    <a:pt x="7090630" y="412176"/>
+                    <a:pt x="7090630" y="412377"/>
                   </a:moveTo>
                   <a:lnTo>
-                    <a:pt x="7019007" y="406435"/>
-                  </a:lnTo>
-                  <a:lnTo>
-                    <a:pt x="6947385" y="400614"/>
-                  </a:lnTo>
-                  <a:lnTo>
-                    <a:pt x="6875762" y="394712"/>
-                  </a:lnTo>
-                  <a:lnTo>
-                    <a:pt x="6804139" y="388726"/>
-                  </a:lnTo>
-                  <a:lnTo>
-                    <a:pt x="6732517" y="382657"/>
-                  </a:lnTo>
-                  <a:lnTo>
-                    <a:pt x="6660894" y="376503"/>
-                  </a:lnTo>
-                  <a:lnTo>
-                    <a:pt x="6589272" y="370263"/>
-                  </a:lnTo>
-                  <a:lnTo>
-                    <a:pt x="6517649" y="363935"/>
-                  </a:lnTo>
-                  <a:lnTo>
-                    <a:pt x="6446027" y="357519"/>
-                  </a:lnTo>
-                  <a:lnTo>
-                    <a:pt x="6374404" y="351013"/>
-                  </a:lnTo>
-                  <a:lnTo>
-                    <a:pt x="6302782" y="344416"/>
-                  </a:lnTo>
-                  <a:lnTo>
-                    <a:pt x="6231159" y="337726"/>
-                  </a:lnTo>
-                  <a:lnTo>
-                    <a:pt x="6159537" y="330943"/>
-                  </a:lnTo>
-                  <a:lnTo>
-                    <a:pt x="6087914" y="324064"/>
-                  </a:lnTo>
-                  <a:lnTo>
-                    <a:pt x="6016292" y="317090"/>
-                  </a:lnTo>
-                  <a:lnTo>
-                    <a:pt x="5944669" y="310017"/>
-                  </a:lnTo>
-                  <a:lnTo>
-                    <a:pt x="5873047" y="302846"/>
-                  </a:lnTo>
-                  <a:lnTo>
-                    <a:pt x="5801424" y="295574"/>
-                  </a:lnTo>
-                  <a:lnTo>
-                    <a:pt x="5729802" y="288200"/>
-                  </a:lnTo>
-                  <a:lnTo>
-                    <a:pt x="5658179" y="280723"/>
-                  </a:lnTo>
-                  <a:lnTo>
-                    <a:pt x="5586557" y="273142"/>
-                  </a:lnTo>
-                  <a:lnTo>
-                    <a:pt x="5514934" y="265454"/>
-                  </a:lnTo>
-                  <a:lnTo>
-                    <a:pt x="5443311" y="257658"/>
-                  </a:lnTo>
-                  <a:lnTo>
-                    <a:pt x="5371689" y="249754"/>
-                  </a:lnTo>
-                  <a:lnTo>
-                    <a:pt x="5300066" y="241738"/>
-                  </a:lnTo>
-                  <a:lnTo>
-                    <a:pt x="5228444" y="233611"/>
-                  </a:lnTo>
-                  <a:lnTo>
-                    <a:pt x="5156821" y="225369"/>
-                  </a:lnTo>
-                  <a:lnTo>
-                    <a:pt x="5085199" y="217012"/>
-                  </a:lnTo>
-                  <a:lnTo>
-                    <a:pt x="5013576" y="208538"/>
-                  </a:lnTo>
-                  <a:lnTo>
-                    <a:pt x="4941954" y="199946"/>
-                  </a:lnTo>
-                  <a:lnTo>
-                    <a:pt x="4870331" y="191233"/>
-                  </a:lnTo>
-                  <a:lnTo>
-                    <a:pt x="4798709" y="182398"/>
-                  </a:lnTo>
-                  <a:lnTo>
-                    <a:pt x="4727086" y="173439"/>
-                  </a:lnTo>
-                  <a:lnTo>
-                    <a:pt x="4655464" y="164355"/>
-                  </a:lnTo>
-                  <a:lnTo>
-                    <a:pt x="4583841" y="155144"/>
-                  </a:lnTo>
-                  <a:lnTo>
-                    <a:pt x="4512219" y="145803"/>
-                  </a:lnTo>
-                  <a:lnTo>
-                    <a:pt x="4440596" y="136332"/>
-                  </a:lnTo>
-                  <a:lnTo>
-                    <a:pt x="4368974" y="126728"/>
-                  </a:lnTo>
-                  <a:lnTo>
-                    <a:pt x="4297351" y="116990"/>
-                  </a:lnTo>
-                  <a:lnTo>
-                    <a:pt x="4225729" y="107115"/>
-                  </a:lnTo>
-                  <a:lnTo>
-                    <a:pt x="4154106" y="97102"/>
-                  </a:lnTo>
-                  <a:lnTo>
-                    <a:pt x="4082483" y="86949"/>
-                  </a:lnTo>
-                  <a:lnTo>
-                    <a:pt x="4010861" y="76653"/>
-                  </a:lnTo>
-                  <a:lnTo>
-                    <a:pt x="3939238" y="66214"/>
-                  </a:lnTo>
-                  <a:lnTo>
-                    <a:pt x="3867616" y="55628"/>
-                  </a:lnTo>
-                  <a:lnTo>
-                    <a:pt x="3795993" y="44894"/>
-                  </a:lnTo>
-                  <a:lnTo>
-                    <a:pt x="3724371" y="34009"/>
-                  </a:lnTo>
-                  <a:lnTo>
-                    <a:pt x="3652748" y="22972"/>
-                  </a:lnTo>
-                  <a:lnTo>
-                    <a:pt x="3581126" y="11781"/>
-                  </a:lnTo>
-                  <a:lnTo>
-                    <a:pt x="3509503" y="433"/>
-                  </a:lnTo>
-                  <a:lnTo>
-                    <a:pt x="3437881" y="0"/>
-                  </a:lnTo>
-                  <a:lnTo>
-                    <a:pt x="3366258" y="22713"/>
-                  </a:lnTo>
-                  <a:lnTo>
-                    <a:pt x="3294636" y="44799"/>
-                  </a:lnTo>
-                  <a:lnTo>
-                    <a:pt x="3223013" y="66274"/>
-                  </a:lnTo>
-                  <a:lnTo>
-                    <a:pt x="3151391" y="87156"/>
-                  </a:lnTo>
-                  <a:lnTo>
-                    <a:pt x="3079768" y="107462"/>
-                  </a:lnTo>
-                  <a:lnTo>
-                    <a:pt x="3008146" y="127206"/>
-                  </a:lnTo>
-                  <a:lnTo>
-                    <a:pt x="2936523" y="146405"/>
-                  </a:lnTo>
-                  <a:lnTo>
-                    <a:pt x="2864901" y="165073"/>
-                  </a:lnTo>
-                  <a:lnTo>
-                    <a:pt x="2793278" y="183225"/>
-                  </a:lnTo>
-                  <a:lnTo>
-                    <a:pt x="2721655" y="200876"/>
-                  </a:lnTo>
-                  <a:lnTo>
-                    <a:pt x="2650033" y="218040"/>
-                  </a:lnTo>
-                  <a:lnTo>
-                    <a:pt x="2578410" y="234729"/>
-                  </a:lnTo>
-                  <a:lnTo>
-                    <a:pt x="2506788" y="250957"/>
-                  </a:lnTo>
-                  <a:lnTo>
-                    <a:pt x="2435165" y="266736"/>
-                  </a:lnTo>
-                  <a:lnTo>
-                    <a:pt x="2363543" y="282080"/>
-                  </a:lnTo>
-                  <a:lnTo>
-                    <a:pt x="2291920" y="296999"/>
-                  </a:lnTo>
-                  <a:lnTo>
-                    <a:pt x="2220298" y="311507"/>
-                  </a:lnTo>
-                  <a:lnTo>
-                    <a:pt x="2148675" y="325614"/>
-                  </a:lnTo>
-                  <a:lnTo>
-                    <a:pt x="2077053" y="339330"/>
-                  </a:lnTo>
-                  <a:lnTo>
-                    <a:pt x="2005430" y="352668"/>
-                  </a:lnTo>
-                  <a:lnTo>
-                    <a:pt x="1933808" y="365638"/>
-                  </a:lnTo>
-                  <a:lnTo>
-                    <a:pt x="1862185" y="378249"/>
-                  </a:lnTo>
-                  <a:lnTo>
-                    <a:pt x="1790563" y="390511"/>
-                  </a:lnTo>
-                  <a:lnTo>
-                    <a:pt x="1718940" y="402435"/>
-                  </a:lnTo>
-                  <a:lnTo>
-                    <a:pt x="1647318" y="414030"/>
-                  </a:lnTo>
-                  <a:lnTo>
-                    <a:pt x="1575695" y="425304"/>
-                  </a:lnTo>
-                  <a:lnTo>
-                    <a:pt x="1504073" y="436266"/>
-                  </a:lnTo>
-                  <a:lnTo>
-                    <a:pt x="1432450" y="446926"/>
-                  </a:lnTo>
-                  <a:lnTo>
-                    <a:pt x="1360827" y="457291"/>
-                  </a:lnTo>
-                  <a:lnTo>
-                    <a:pt x="1289205" y="467370"/>
-                  </a:lnTo>
-                  <a:lnTo>
-                    <a:pt x="1217582" y="477170"/>
-                  </a:lnTo>
-                  <a:lnTo>
-                    <a:pt x="1145960" y="486700"/>
-                  </a:lnTo>
-                  <a:lnTo>
-                    <a:pt x="1074337" y="495966"/>
-                  </a:lnTo>
-                  <a:lnTo>
-                    <a:pt x="1002715" y="504976"/>
-                  </a:lnTo>
-                  <a:lnTo>
-                    <a:pt x="931092" y="513737"/>
-                  </a:lnTo>
-                  <a:lnTo>
-                    <a:pt x="859470" y="522256"/>
-                  </a:lnTo>
-                  <a:lnTo>
-                    <a:pt x="787847" y="530540"/>
-                  </a:lnTo>
-                  <a:lnTo>
-                    <a:pt x="716225" y="538595"/>
-                  </a:lnTo>
-                  <a:lnTo>
-                    <a:pt x="644602" y="546428"/>
-                  </a:lnTo>
-                  <a:lnTo>
-                    <a:pt x="572980" y="554044"/>
-                  </a:lnTo>
-                  <a:lnTo>
-                    <a:pt x="501357" y="561449"/>
-                  </a:lnTo>
-                  <a:lnTo>
-                    <a:pt x="429735" y="568650"/>
-                  </a:lnTo>
-                  <a:lnTo>
-                    <a:pt x="358112" y="575652"/>
-                  </a:lnTo>
-                  <a:lnTo>
-                    <a:pt x="286490" y="582461"/>
-                  </a:lnTo>
-                  <a:lnTo>
-                    <a:pt x="214867" y="589081"/>
-                  </a:lnTo>
-                  <a:lnTo>
-                    <a:pt x="143245" y="595519"/>
-                  </a:lnTo>
-                  <a:lnTo>
-                    <a:pt x="71622" y="601778"/>
-                  </a:lnTo>
-                  <a:lnTo>
-                    <a:pt x="0" y="607865"/>
+                    <a:pt x="7019007" y="406622"/>
+                  </a:lnTo>
+                  <a:lnTo>
+                    <a:pt x="6947385" y="400788"/>
+                  </a:lnTo>
+                  <a:lnTo>
+                    <a:pt x="6875762" y="394871"/>
+                  </a:lnTo>
+                  <a:lnTo>
+                    <a:pt x="6804139" y="388872"/>
+                  </a:lnTo>
+                  <a:lnTo>
+                    <a:pt x="6732517" y="382790"/>
+                  </a:lnTo>
+                  <a:lnTo>
+                    <a:pt x="6660894" y="376622"/>
+                  </a:lnTo>
+                  <a:lnTo>
+                    <a:pt x="6589272" y="370368"/>
+                  </a:lnTo>
+                  <a:lnTo>
+                    <a:pt x="6517649" y="364027"/>
+                  </a:lnTo>
+                  <a:lnTo>
+                    <a:pt x="6446027" y="357597"/>
+                  </a:lnTo>
+                  <a:lnTo>
+                    <a:pt x="6374404" y="351077"/>
+                  </a:lnTo>
+                  <a:lnTo>
+                    <a:pt x="6302782" y="344466"/>
+                  </a:lnTo>
+                  <a:lnTo>
+                    <a:pt x="6231159" y="337762"/>
+                  </a:lnTo>
+                  <a:lnTo>
+                    <a:pt x="6159537" y="330965"/>
+                  </a:lnTo>
+                  <a:lnTo>
+                    <a:pt x="6087914" y="324073"/>
+                  </a:lnTo>
+                  <a:lnTo>
+                    <a:pt x="6016292" y="317085"/>
+                  </a:lnTo>
+                  <a:lnTo>
+                    <a:pt x="5944669" y="309999"/>
+                  </a:lnTo>
+                  <a:lnTo>
+                    <a:pt x="5873047" y="302814"/>
+                  </a:lnTo>
+                  <a:lnTo>
+                    <a:pt x="5801424" y="295529"/>
+                  </a:lnTo>
+                  <a:lnTo>
+                    <a:pt x="5729802" y="288142"/>
+                  </a:lnTo>
+                  <a:lnTo>
+                    <a:pt x="5658179" y="280651"/>
+                  </a:lnTo>
+                  <a:lnTo>
+                    <a:pt x="5586557" y="273056"/>
+                  </a:lnTo>
+                  <a:lnTo>
+                    <a:pt x="5514934" y="265355"/>
+                  </a:lnTo>
+                  <a:lnTo>
+                    <a:pt x="5443311" y="257546"/>
+                  </a:lnTo>
+                  <a:lnTo>
+                    <a:pt x="5371689" y="249628"/>
+                  </a:lnTo>
+                  <a:lnTo>
+                    <a:pt x="5300066" y="241600"/>
+                  </a:lnTo>
+                  <a:lnTo>
+                    <a:pt x="5228444" y="233459"/>
+                  </a:lnTo>
+                  <a:lnTo>
+                    <a:pt x="5156821" y="225205"/>
+                  </a:lnTo>
+                  <a:lnTo>
+                    <a:pt x="5085199" y="216835"/>
+                  </a:lnTo>
+                  <a:lnTo>
+                    <a:pt x="5013576" y="208348"/>
+                  </a:lnTo>
+                  <a:lnTo>
+                    <a:pt x="4941954" y="199743"/>
+                  </a:lnTo>
+                  <a:lnTo>
+                    <a:pt x="4870331" y="191017"/>
+                  </a:lnTo>
+                  <a:lnTo>
+                    <a:pt x="4798709" y="182169"/>
+                  </a:lnTo>
+                  <a:lnTo>
+                    <a:pt x="4727086" y="173198"/>
+                  </a:lnTo>
+                  <a:lnTo>
+                    <a:pt x="4655464" y="164102"/>
+                  </a:lnTo>
+                  <a:lnTo>
+                    <a:pt x="4583841" y="154878"/>
+                  </a:lnTo>
+                  <a:lnTo>
+                    <a:pt x="4512219" y="145525"/>
+                  </a:lnTo>
+                  <a:lnTo>
+                    <a:pt x="4440596" y="136042"/>
+                  </a:lnTo>
+                  <a:lnTo>
+                    <a:pt x="4368974" y="126426"/>
+                  </a:lnTo>
+                  <a:lnTo>
+                    <a:pt x="4297351" y="116676"/>
+                  </a:lnTo>
+                  <a:lnTo>
+                    <a:pt x="4225729" y="106790"/>
+                  </a:lnTo>
+                  <a:lnTo>
+                    <a:pt x="4154106" y="96765"/>
+                  </a:lnTo>
+                  <a:lnTo>
+                    <a:pt x="4082483" y="86600"/>
+                  </a:lnTo>
+                  <a:lnTo>
+                    <a:pt x="4010861" y="76294"/>
+                  </a:lnTo>
+                  <a:lnTo>
+                    <a:pt x="3939238" y="65843"/>
+                  </a:lnTo>
+                  <a:lnTo>
+                    <a:pt x="3867616" y="55246"/>
+                  </a:lnTo>
+                  <a:lnTo>
+                    <a:pt x="3795993" y="44501"/>
+                  </a:lnTo>
+                  <a:lnTo>
+                    <a:pt x="3724371" y="33606"/>
+                  </a:lnTo>
+                  <a:lnTo>
+                    <a:pt x="3652748" y="22559"/>
+                  </a:lnTo>
+                  <a:lnTo>
+                    <a:pt x="3581126" y="11358"/>
+                  </a:lnTo>
+                  <a:lnTo>
+                    <a:pt x="3509503" y="0"/>
+                  </a:lnTo>
+                  <a:lnTo>
+                    <a:pt x="3437881" y="7133"/>
+                  </a:lnTo>
+                  <a:lnTo>
+                    <a:pt x="3366258" y="29702"/>
+                  </a:lnTo>
+                  <a:lnTo>
+                    <a:pt x="3294636" y="51648"/>
+                  </a:lnTo>
+                  <a:lnTo>
+                    <a:pt x="3223013" y="72987"/>
+                  </a:lnTo>
+                  <a:lnTo>
+                    <a:pt x="3151391" y="93737"/>
+                  </a:lnTo>
+                  <a:lnTo>
+                    <a:pt x="3079768" y="113914"/>
+                  </a:lnTo>
+                  <a:lnTo>
+                    <a:pt x="3008146" y="133534"/>
+                  </a:lnTo>
+                  <a:lnTo>
+                    <a:pt x="2936523" y="152612"/>
+                  </a:lnTo>
+                  <a:lnTo>
+                    <a:pt x="2864901" y="171162"/>
+                  </a:lnTo>
+                  <a:lnTo>
+                    <a:pt x="2793278" y="189200"/>
+                  </a:lnTo>
+                  <a:lnTo>
+                    <a:pt x="2721655" y="206740"/>
+                  </a:lnTo>
+                  <a:lnTo>
+                    <a:pt x="2650033" y="223796"/>
+                  </a:lnTo>
+                  <a:lnTo>
+                    <a:pt x="2578410" y="240380"/>
+                  </a:lnTo>
+                  <a:lnTo>
+                    <a:pt x="2506788" y="256506"/>
+                  </a:lnTo>
+                  <a:lnTo>
+                    <a:pt x="2435165" y="272187"/>
+                  </a:lnTo>
+                  <a:lnTo>
+                    <a:pt x="2363543" y="287435"/>
+                  </a:lnTo>
+                  <a:lnTo>
+                    <a:pt x="2291920" y="302261"/>
+                  </a:lnTo>
+                  <a:lnTo>
+                    <a:pt x="2220298" y="316678"/>
+                  </a:lnTo>
+                  <a:lnTo>
+                    <a:pt x="2148675" y="330696"/>
+                  </a:lnTo>
+                  <a:lnTo>
+                    <a:pt x="2077053" y="344328"/>
+                  </a:lnTo>
+                  <a:lnTo>
+                    <a:pt x="2005430" y="357583"/>
+                  </a:lnTo>
+                  <a:lnTo>
+                    <a:pt x="1933808" y="370471"/>
+                  </a:lnTo>
+                  <a:lnTo>
+                    <a:pt x="1862185" y="383004"/>
+                  </a:lnTo>
+                  <a:lnTo>
+                    <a:pt x="1790563" y="395190"/>
+                  </a:lnTo>
+                  <a:lnTo>
+                    <a:pt x="1718940" y="407040"/>
+                  </a:lnTo>
+                  <a:lnTo>
+                    <a:pt x="1647318" y="418563"/>
+                  </a:lnTo>
+                  <a:lnTo>
+                    <a:pt x="1575695" y="429767"/>
+                  </a:lnTo>
+                  <a:lnTo>
+                    <a:pt x="1504073" y="440662"/>
+                  </a:lnTo>
+                  <a:lnTo>
+                    <a:pt x="1432450" y="451255"/>
+                  </a:lnTo>
+                  <a:lnTo>
+                    <a:pt x="1360827" y="461557"/>
+                  </a:lnTo>
+                  <a:lnTo>
+                    <a:pt x="1289205" y="471573"/>
+                  </a:lnTo>
+                  <a:lnTo>
+                    <a:pt x="1217582" y="481313"/>
+                  </a:lnTo>
+                  <a:lnTo>
+                    <a:pt x="1145960" y="490784"/>
+                  </a:lnTo>
+                  <a:lnTo>
+                    <a:pt x="1074337" y="499993"/>
+                  </a:lnTo>
+                  <a:lnTo>
+                    <a:pt x="1002715" y="508948"/>
+                  </a:lnTo>
+                  <a:lnTo>
+                    <a:pt x="931092" y="517655"/>
+                  </a:lnTo>
+                  <a:lnTo>
+                    <a:pt x="859470" y="526122"/>
+                  </a:lnTo>
+                  <a:lnTo>
+                    <a:pt x="787847" y="534355"/>
+                  </a:lnTo>
+                  <a:lnTo>
+                    <a:pt x="716225" y="542361"/>
+                  </a:lnTo>
+                  <a:lnTo>
+                    <a:pt x="644602" y="550146"/>
+                  </a:lnTo>
+                  <a:lnTo>
+                    <a:pt x="572980" y="557715"/>
+                  </a:lnTo>
+                  <a:lnTo>
+                    <a:pt x="501357" y="565075"/>
+                  </a:lnTo>
+                  <a:lnTo>
+                    <a:pt x="429735" y="572232"/>
+                  </a:lnTo>
+                  <a:lnTo>
+                    <a:pt x="358112" y="579192"/>
+                  </a:lnTo>
+                  <a:lnTo>
+                    <a:pt x="286490" y="585959"/>
+                  </a:lnTo>
+                  <a:lnTo>
+                    <a:pt x="214867" y="592539"/>
+                  </a:lnTo>
+                  <a:lnTo>
+                    <a:pt x="143245" y="598938"/>
+                  </a:lnTo>
+                  <a:lnTo>
+                    <a:pt x="71622" y="605159"/>
+                  </a:lnTo>
+                  <a:lnTo>
+                    <a:pt x="0" y="611209"/>
                   </a:lnTo>
                 </a:path>
               </a:pathLst>
@@ -4670,309 +4670,309 @@
           </p:nvSpPr>
           <p:spPr>
             <a:xfrm>
-              <a:off x="1172049" y="4371255"/>
-              <a:ext cx="7090630" cy="596135"/>
+              <a:off x="1172049" y="4372355"/>
+              <a:ext cx="7090630" cy="596301"/>
             </a:xfrm>
             <a:custGeom>
               <a:avLst/>
               <a:pathLst>
-                <a:path w="7090630" h="596135">
+                <a:path w="7090630" h="596301">
                   <a:moveTo>
-                    <a:pt x="0" y="596135"/>
+                    <a:pt x="0" y="596301"/>
                   </a:moveTo>
                   <a:lnTo>
-                    <a:pt x="71622" y="591959"/>
-                  </a:lnTo>
-                  <a:lnTo>
-                    <a:pt x="143245" y="587753"/>
-                  </a:lnTo>
-                  <a:lnTo>
-                    <a:pt x="214867" y="583517"/>
-                  </a:lnTo>
-                  <a:lnTo>
-                    <a:pt x="286490" y="579252"/>
-                  </a:lnTo>
-                  <a:lnTo>
-                    <a:pt x="358112" y="574956"/>
-                  </a:lnTo>
-                  <a:lnTo>
-                    <a:pt x="429735" y="570630"/>
-                  </a:lnTo>
-                  <a:lnTo>
-                    <a:pt x="501357" y="566273"/>
-                  </a:lnTo>
-                  <a:lnTo>
-                    <a:pt x="572980" y="561886"/>
-                  </a:lnTo>
-                  <a:lnTo>
-                    <a:pt x="644602" y="557467"/>
-                  </a:lnTo>
-                  <a:lnTo>
-                    <a:pt x="716225" y="553017"/>
-                  </a:lnTo>
-                  <a:lnTo>
-                    <a:pt x="787847" y="548535"/>
-                  </a:lnTo>
-                  <a:lnTo>
-                    <a:pt x="859470" y="544022"/>
-                  </a:lnTo>
-                  <a:lnTo>
-                    <a:pt x="931092" y="539477"/>
-                  </a:lnTo>
-                  <a:lnTo>
-                    <a:pt x="1002715" y="534900"/>
-                  </a:lnTo>
-                  <a:lnTo>
-                    <a:pt x="1074337" y="530290"/>
-                  </a:lnTo>
-                  <a:lnTo>
-                    <a:pt x="1145960" y="525647"/>
-                  </a:lnTo>
-                  <a:lnTo>
-                    <a:pt x="1217582" y="520972"/>
-                  </a:lnTo>
-                  <a:lnTo>
-                    <a:pt x="1289205" y="516264"/>
-                  </a:lnTo>
-                  <a:lnTo>
-                    <a:pt x="1360827" y="511522"/>
-                  </a:lnTo>
-                  <a:lnTo>
-                    <a:pt x="1432450" y="506747"/>
-                  </a:lnTo>
-                  <a:lnTo>
-                    <a:pt x="1504073" y="501938"/>
-                  </a:lnTo>
-                  <a:lnTo>
-                    <a:pt x="1575695" y="497095"/>
-                  </a:lnTo>
-                  <a:lnTo>
-                    <a:pt x="1647318" y="492217"/>
-                  </a:lnTo>
-                  <a:lnTo>
-                    <a:pt x="1718940" y="487305"/>
-                  </a:lnTo>
-                  <a:lnTo>
-                    <a:pt x="1790563" y="482358"/>
-                  </a:lnTo>
-                  <a:lnTo>
-                    <a:pt x="1862185" y="477377"/>
-                  </a:lnTo>
-                  <a:lnTo>
-                    <a:pt x="1933808" y="472360"/>
-                  </a:lnTo>
-                  <a:lnTo>
-                    <a:pt x="2005430" y="467307"/>
-                  </a:lnTo>
-                  <a:lnTo>
-                    <a:pt x="2077053" y="462219"/>
-                  </a:lnTo>
-                  <a:lnTo>
-                    <a:pt x="2148675" y="457094"/>
-                  </a:lnTo>
-                  <a:lnTo>
-                    <a:pt x="2220298" y="451934"/>
-                  </a:lnTo>
-                  <a:lnTo>
-                    <a:pt x="2291920" y="446737"/>
-                  </a:lnTo>
-                  <a:lnTo>
-                    <a:pt x="2363543" y="441503"/>
-                  </a:lnTo>
-                  <a:lnTo>
-                    <a:pt x="2435165" y="436232"/>
-                  </a:lnTo>
-                  <a:lnTo>
-                    <a:pt x="2506788" y="430923"/>
-                  </a:lnTo>
-                  <a:lnTo>
-                    <a:pt x="2578410" y="425577"/>
-                  </a:lnTo>
-                  <a:lnTo>
-                    <a:pt x="2650033" y="420194"/>
-                  </a:lnTo>
-                  <a:lnTo>
-                    <a:pt x="2721655" y="414772"/>
-                  </a:lnTo>
-                  <a:lnTo>
-                    <a:pt x="2793278" y="409311"/>
-                  </a:lnTo>
-                  <a:lnTo>
-                    <a:pt x="2864901" y="403812"/>
-                  </a:lnTo>
-                  <a:lnTo>
-                    <a:pt x="2936523" y="398275"/>
-                  </a:lnTo>
-                  <a:lnTo>
-                    <a:pt x="3008146" y="392697"/>
-                  </a:lnTo>
-                  <a:lnTo>
-                    <a:pt x="3079768" y="387081"/>
-                  </a:lnTo>
-                  <a:lnTo>
-                    <a:pt x="3151391" y="381425"/>
-                  </a:lnTo>
-                  <a:lnTo>
-                    <a:pt x="3223013" y="375728"/>
-                  </a:lnTo>
-                  <a:lnTo>
-                    <a:pt x="3294636" y="369992"/>
-                  </a:lnTo>
-                  <a:lnTo>
-                    <a:pt x="3366258" y="364214"/>
-                  </a:lnTo>
-                  <a:lnTo>
-                    <a:pt x="3437881" y="358396"/>
-                  </a:lnTo>
-                  <a:lnTo>
-                    <a:pt x="3509503" y="352537"/>
-                  </a:lnTo>
-                  <a:lnTo>
-                    <a:pt x="3581126" y="346636"/>
-                  </a:lnTo>
-                  <a:lnTo>
-                    <a:pt x="3652748" y="340693"/>
-                  </a:lnTo>
-                  <a:lnTo>
-                    <a:pt x="3724371" y="334708"/>
-                  </a:lnTo>
-                  <a:lnTo>
-                    <a:pt x="3795993" y="328681"/>
-                  </a:lnTo>
-                  <a:lnTo>
-                    <a:pt x="3867616" y="322611"/>
-                  </a:lnTo>
-                  <a:lnTo>
-                    <a:pt x="3939238" y="316498"/>
-                  </a:lnTo>
-                  <a:lnTo>
-                    <a:pt x="4010861" y="310342"/>
-                  </a:lnTo>
-                  <a:lnTo>
-                    <a:pt x="4082483" y="304143"/>
-                  </a:lnTo>
-                  <a:lnTo>
-                    <a:pt x="4154106" y="297899"/>
-                  </a:lnTo>
-                  <a:lnTo>
-                    <a:pt x="4225729" y="291612"/>
-                  </a:lnTo>
-                  <a:lnTo>
-                    <a:pt x="4297351" y="285279"/>
-                  </a:lnTo>
-                  <a:lnTo>
-                    <a:pt x="4368974" y="278902"/>
-                  </a:lnTo>
-                  <a:lnTo>
-                    <a:pt x="4440596" y="272480"/>
-                  </a:lnTo>
-                  <a:lnTo>
-                    <a:pt x="4512219" y="266012"/>
-                  </a:lnTo>
-                  <a:lnTo>
-                    <a:pt x="4583841" y="259499"/>
-                  </a:lnTo>
-                  <a:lnTo>
-                    <a:pt x="4655464" y="252939"/>
-                  </a:lnTo>
-                  <a:lnTo>
-                    <a:pt x="4727086" y="246333"/>
-                  </a:lnTo>
-                  <a:lnTo>
-                    <a:pt x="4798709" y="239680"/>
-                  </a:lnTo>
-                  <a:lnTo>
-                    <a:pt x="4870331" y="232980"/>
-                  </a:lnTo>
-                  <a:lnTo>
-                    <a:pt x="4941954" y="226233"/>
-                  </a:lnTo>
-                  <a:lnTo>
-                    <a:pt x="5013576" y="219438"/>
-                  </a:lnTo>
-                  <a:lnTo>
-                    <a:pt x="5085199" y="212595"/>
-                  </a:lnTo>
-                  <a:lnTo>
-                    <a:pt x="5156821" y="205703"/>
-                  </a:lnTo>
-                  <a:lnTo>
-                    <a:pt x="5228444" y="198762"/>
-                  </a:lnTo>
-                  <a:lnTo>
-                    <a:pt x="5300066" y="191773"/>
-                  </a:lnTo>
-                  <a:lnTo>
-                    <a:pt x="5371689" y="184734"/>
-                  </a:lnTo>
-                  <a:lnTo>
-                    <a:pt x="5443311" y="177645"/>
-                  </a:lnTo>
-                  <a:lnTo>
-                    <a:pt x="5514934" y="170505"/>
-                  </a:lnTo>
-                  <a:lnTo>
-                    <a:pt x="5586557" y="163316"/>
-                  </a:lnTo>
-                  <a:lnTo>
-                    <a:pt x="5658179" y="156075"/>
-                  </a:lnTo>
-                  <a:lnTo>
-                    <a:pt x="5729802" y="148783"/>
-                  </a:lnTo>
-                  <a:lnTo>
-                    <a:pt x="5801424" y="141440"/>
-                  </a:lnTo>
-                  <a:lnTo>
-                    <a:pt x="5873047" y="134044"/>
-                  </a:lnTo>
-                  <a:lnTo>
-                    <a:pt x="5944669" y="126597"/>
-                  </a:lnTo>
-                  <a:lnTo>
-                    <a:pt x="6016292" y="119096"/>
-                  </a:lnTo>
-                  <a:lnTo>
-                    <a:pt x="6087914" y="111542"/>
-                  </a:lnTo>
-                  <a:lnTo>
-                    <a:pt x="6159537" y="103935"/>
-                  </a:lnTo>
-                  <a:lnTo>
-                    <a:pt x="6231159" y="96274"/>
-                  </a:lnTo>
-                  <a:lnTo>
-                    <a:pt x="6302782" y="88559"/>
-                  </a:lnTo>
-                  <a:lnTo>
-                    <a:pt x="6374404" y="80789"/>
-                  </a:lnTo>
-                  <a:lnTo>
-                    <a:pt x="6446027" y="72964"/>
-                  </a:lnTo>
-                  <a:lnTo>
-                    <a:pt x="6517649" y="65084"/>
-                  </a:lnTo>
-                  <a:lnTo>
-                    <a:pt x="6589272" y="57148"/>
-                  </a:lnTo>
-                  <a:lnTo>
-                    <a:pt x="6660894" y="49156"/>
-                  </a:lnTo>
-                  <a:lnTo>
-                    <a:pt x="6732517" y="41107"/>
-                  </a:lnTo>
-                  <a:lnTo>
-                    <a:pt x="6804139" y="33001"/>
-                  </a:lnTo>
-                  <a:lnTo>
-                    <a:pt x="6875762" y="24838"/>
-                  </a:lnTo>
-                  <a:lnTo>
-                    <a:pt x="6947385" y="16617"/>
-                  </a:lnTo>
-                  <a:lnTo>
-                    <a:pt x="7019007" y="8337"/>
+                    <a:pt x="71622" y="592126"/>
+                  </a:lnTo>
+                  <a:lnTo>
+                    <a:pt x="143245" y="587922"/>
+                  </a:lnTo>
+                  <a:lnTo>
+                    <a:pt x="214867" y="583688"/>
+                  </a:lnTo>
+                  <a:lnTo>
+                    <a:pt x="286490" y="579424"/>
+                  </a:lnTo>
+                  <a:lnTo>
+                    <a:pt x="358112" y="575130"/>
+                  </a:lnTo>
+                  <a:lnTo>
+                    <a:pt x="429735" y="570805"/>
+                  </a:lnTo>
+                  <a:lnTo>
+                    <a:pt x="501357" y="566449"/>
+                  </a:lnTo>
+                  <a:lnTo>
+                    <a:pt x="572980" y="562063"/>
+                  </a:lnTo>
+                  <a:lnTo>
+                    <a:pt x="644602" y="557646"/>
+                  </a:lnTo>
+                  <a:lnTo>
+                    <a:pt x="716225" y="553197"/>
+                  </a:lnTo>
+                  <a:lnTo>
+                    <a:pt x="787847" y="548717"/>
+                  </a:lnTo>
+                  <a:lnTo>
+                    <a:pt x="859470" y="544205"/>
+                  </a:lnTo>
+                  <a:lnTo>
+                    <a:pt x="931092" y="539661"/>
+                  </a:lnTo>
+                  <a:lnTo>
+                    <a:pt x="1002715" y="535084"/>
+                  </a:lnTo>
+                  <a:lnTo>
+                    <a:pt x="1074337" y="530476"/>
+                  </a:lnTo>
+                  <a:lnTo>
+                    <a:pt x="1145960" y="525834"/>
+                  </a:lnTo>
+                  <a:lnTo>
+                    <a:pt x="1217582" y="521160"/>
+                  </a:lnTo>
+                  <a:lnTo>
+                    <a:pt x="1289205" y="516452"/>
+                  </a:lnTo>
+                  <a:lnTo>
+                    <a:pt x="1360827" y="511712"/>
+                  </a:lnTo>
+                  <a:lnTo>
+                    <a:pt x="1432450" y="506937"/>
+                  </a:lnTo>
+                  <a:lnTo>
+                    <a:pt x="1504073" y="502129"/>
+                  </a:lnTo>
+                  <a:lnTo>
+                    <a:pt x="1575695" y="497286"/>
+                  </a:lnTo>
+                  <a:lnTo>
+                    <a:pt x="1647318" y="492409"/>
+                  </a:lnTo>
+                  <a:lnTo>
+                    <a:pt x="1718940" y="487498"/>
+                  </a:lnTo>
+                  <a:lnTo>
+                    <a:pt x="1790563" y="482552"/>
+                  </a:lnTo>
+                  <a:lnTo>
+                    <a:pt x="1862185" y="477570"/>
+                  </a:lnTo>
+                  <a:lnTo>
+                    <a:pt x="1933808" y="472554"/>
+                  </a:lnTo>
+                  <a:lnTo>
+                    <a:pt x="2005430" y="467501"/>
+                  </a:lnTo>
+                  <a:lnTo>
+                    <a:pt x="2077053" y="462413"/>
+                  </a:lnTo>
+                  <a:lnTo>
+                    <a:pt x="2148675" y="457289"/>
+                  </a:lnTo>
+                  <a:lnTo>
+                    <a:pt x="2220298" y="452129"/>
+                  </a:lnTo>
+                  <a:lnTo>
+                    <a:pt x="2291920" y="446932"/>
+                  </a:lnTo>
+                  <a:lnTo>
+                    <a:pt x="2363543" y="441698"/>
+                  </a:lnTo>
+                  <a:lnTo>
+                    <a:pt x="2435165" y="436427"/>
+                  </a:lnTo>
+                  <a:lnTo>
+                    <a:pt x="2506788" y="431118"/>
+                  </a:lnTo>
+                  <a:lnTo>
+                    <a:pt x="2578410" y="425772"/>
+                  </a:lnTo>
+                  <a:lnTo>
+                    <a:pt x="2650033" y="420388"/>
+                  </a:lnTo>
+                  <a:lnTo>
+                    <a:pt x="2721655" y="414966"/>
+                  </a:lnTo>
+                  <a:lnTo>
+                    <a:pt x="2793278" y="409505"/>
+                  </a:lnTo>
+                  <a:lnTo>
+                    <a:pt x="2864901" y="404006"/>
+                  </a:lnTo>
+                  <a:lnTo>
+                    <a:pt x="2936523" y="398467"/>
+                  </a:lnTo>
+                  <a:lnTo>
+                    <a:pt x="3008146" y="392890"/>
+                  </a:lnTo>
+                  <a:lnTo>
+                    <a:pt x="3079768" y="387272"/>
+                  </a:lnTo>
+                  <a:lnTo>
+                    <a:pt x="3151391" y="381615"/>
+                  </a:lnTo>
+                  <a:lnTo>
+                    <a:pt x="3223013" y="375918"/>
+                  </a:lnTo>
+                  <a:lnTo>
+                    <a:pt x="3294636" y="370181"/>
+                  </a:lnTo>
+                  <a:lnTo>
+                    <a:pt x="3366258" y="364402"/>
+                  </a:lnTo>
+                  <a:lnTo>
+                    <a:pt x="3437881" y="358583"/>
+                  </a:lnTo>
+                  <a:lnTo>
+                    <a:pt x="3509503" y="352722"/>
+                  </a:lnTo>
+                  <a:lnTo>
+                    <a:pt x="3581126" y="346820"/>
+                  </a:lnTo>
+                  <a:lnTo>
+                    <a:pt x="3652748" y="340876"/>
+                  </a:lnTo>
+                  <a:lnTo>
+                    <a:pt x="3724371" y="334890"/>
+                  </a:lnTo>
+                  <a:lnTo>
+                    <a:pt x="3795993" y="328862"/>
+                  </a:lnTo>
+                  <a:lnTo>
+                    <a:pt x="3867616" y="322790"/>
+                  </a:lnTo>
+                  <a:lnTo>
+                    <a:pt x="3939238" y="316676"/>
+                  </a:lnTo>
+                  <a:lnTo>
+                    <a:pt x="4010861" y="310518"/>
+                  </a:lnTo>
+                  <a:lnTo>
+                    <a:pt x="4082483" y="304317"/>
+                  </a:lnTo>
+                  <a:lnTo>
+                    <a:pt x="4154106" y="298071"/>
+                  </a:lnTo>
+                  <a:lnTo>
+                    <a:pt x="4225729" y="291781"/>
+                  </a:lnTo>
+                  <a:lnTo>
+                    <a:pt x="4297351" y="285447"/>
+                  </a:lnTo>
+                  <a:lnTo>
+                    <a:pt x="4368974" y="279068"/>
+                  </a:lnTo>
+                  <a:lnTo>
+                    <a:pt x="4440596" y="272643"/>
+                  </a:lnTo>
+                  <a:lnTo>
+                    <a:pt x="4512219" y="266173"/>
+                  </a:lnTo>
+                  <a:lnTo>
+                    <a:pt x="4583841" y="259657"/>
+                  </a:lnTo>
+                  <a:lnTo>
+                    <a:pt x="4655464" y="253095"/>
+                  </a:lnTo>
+                  <a:lnTo>
+                    <a:pt x="4727086" y="246486"/>
+                  </a:lnTo>
+                  <a:lnTo>
+                    <a:pt x="4798709" y="239831"/>
+                  </a:lnTo>
+                  <a:lnTo>
+                    <a:pt x="4870331" y="233128"/>
+                  </a:lnTo>
+                  <a:lnTo>
+                    <a:pt x="4941954" y="226377"/>
+                  </a:lnTo>
+                  <a:lnTo>
+                    <a:pt x="5013576" y="219579"/>
+                  </a:lnTo>
+                  <a:lnTo>
+                    <a:pt x="5085199" y="212733"/>
+                  </a:lnTo>
+                  <a:lnTo>
+                    <a:pt x="5156821" y="205838"/>
+                  </a:lnTo>
+                  <a:lnTo>
+                    <a:pt x="5228444" y="198894"/>
+                  </a:lnTo>
+                  <a:lnTo>
+                    <a:pt x="5300066" y="191901"/>
+                  </a:lnTo>
+                  <a:lnTo>
+                    <a:pt x="5371689" y="184858"/>
+                  </a:lnTo>
+                  <a:lnTo>
+                    <a:pt x="5443311" y="177765"/>
+                  </a:lnTo>
+                  <a:lnTo>
+                    <a:pt x="5514934" y="170622"/>
+                  </a:lnTo>
+                  <a:lnTo>
+                    <a:pt x="5586557" y="163429"/>
+                  </a:lnTo>
+                  <a:lnTo>
+                    <a:pt x="5658179" y="156184"/>
+                  </a:lnTo>
+                  <a:lnTo>
+                    <a:pt x="5729802" y="148888"/>
+                  </a:lnTo>
+                  <a:lnTo>
+                    <a:pt x="5801424" y="141540"/>
+                  </a:lnTo>
+                  <a:lnTo>
+                    <a:pt x="5873047" y="134140"/>
+                  </a:lnTo>
+                  <a:lnTo>
+                    <a:pt x="5944669" y="126688"/>
+                  </a:lnTo>
+                  <a:lnTo>
+                    <a:pt x="6016292" y="119183"/>
+                  </a:lnTo>
+                  <a:lnTo>
+                    <a:pt x="6087914" y="111624"/>
+                  </a:lnTo>
+                  <a:lnTo>
+                    <a:pt x="6159537" y="104012"/>
+                  </a:lnTo>
+                  <a:lnTo>
+                    <a:pt x="6231159" y="96346"/>
+                  </a:lnTo>
+                  <a:lnTo>
+                    <a:pt x="6302782" y="88625"/>
+                  </a:lnTo>
+                  <a:lnTo>
+                    <a:pt x="6374404" y="80850"/>
+                  </a:lnTo>
+                  <a:lnTo>
+                    <a:pt x="6446027" y="73020"/>
+                  </a:lnTo>
+                  <a:lnTo>
+                    <a:pt x="6517649" y="65134"/>
+                  </a:lnTo>
+                  <a:lnTo>
+                    <a:pt x="6589272" y="57192"/>
+                  </a:lnTo>
+                  <a:lnTo>
+                    <a:pt x="6660894" y="49194"/>
+                  </a:lnTo>
+                  <a:lnTo>
+                    <a:pt x="6732517" y="41139"/>
+                  </a:lnTo>
+                  <a:lnTo>
+                    <a:pt x="6804139" y="33027"/>
+                  </a:lnTo>
+                  <a:lnTo>
+                    <a:pt x="6875762" y="24857"/>
+                  </a:lnTo>
+                  <a:lnTo>
+                    <a:pt x="6947385" y="16630"/>
+                  </a:lnTo>
+                  <a:lnTo>
+                    <a:pt x="7019007" y="8344"/>
                   </a:lnTo>
                   <a:lnTo>
                     <a:pt x="7090630" y="0"/>
@@ -5047,7 +5047,7 @@
           </p:nvSpPr>
           <p:spPr>
             <a:xfrm>
-              <a:off x="4632789" y="2073503"/>
+              <a:off x="4648520" y="2073503"/>
               <a:ext cx="0" cy="3649639"/>
             </a:xfrm>
             <a:custGeom>
@@ -5090,7 +5090,7 @@
           </p:nvSpPr>
           <p:spPr>
             <a:xfrm>
-              <a:off x="3519238" y="2073503"/>
+              <a:off x="3510041" y="2073503"/>
               <a:ext cx="0" cy="3649639"/>
             </a:xfrm>
             <a:custGeom>
@@ -5133,7 +5133,7 @@
           </p:nvSpPr>
           <p:spPr>
             <a:xfrm>
-              <a:off x="5667105" y="2073503"/>
+              <a:off x="5671562" y="2073503"/>
               <a:ext cx="0" cy="3649639"/>
             </a:xfrm>
             <a:custGeom>
@@ -5406,7 +5406,7 @@
           </p:nvSpPr>
           <p:spPr>
             <a:xfrm>
-              <a:off x="787919" y="5785772"/>
+              <a:off x="789147" y="5785772"/>
               <a:ext cx="161574" cy="80101"/>
             </a:xfrm>
             <a:prstGeom prst="rect">
@@ -5452,7 +5452,7 @@
           </p:nvSpPr>
           <p:spPr>
             <a:xfrm>
-              <a:off x="1701509" y="5785772"/>
+              <a:off x="1701133" y="5785772"/>
               <a:ext cx="161574" cy="80101"/>
             </a:xfrm>
             <a:prstGeom prst="rect">
@@ -5498,7 +5498,7 @@
           </p:nvSpPr>
           <p:spPr>
             <a:xfrm>
-              <a:off x="2615100" y="5785772"/>
+              <a:off x="2613120" y="5785772"/>
               <a:ext cx="161574" cy="80101"/>
             </a:xfrm>
             <a:prstGeom prst="rect">
@@ -5544,7 +5544,7 @@
           </p:nvSpPr>
           <p:spPr>
             <a:xfrm>
-              <a:off x="3528691" y="5785772"/>
+              <a:off x="3525106" y="5785772"/>
               <a:ext cx="161574" cy="80101"/>
             </a:xfrm>
             <a:prstGeom prst="rect">
@@ -5590,7 +5590,7 @@
           </p:nvSpPr>
           <p:spPr>
             <a:xfrm>
-              <a:off x="4442282" y="5785772"/>
+              <a:off x="4437092" y="5785772"/>
               <a:ext cx="161574" cy="80101"/>
             </a:xfrm>
             <a:prstGeom prst="rect">
@@ -5636,7 +5636,7 @@
           </p:nvSpPr>
           <p:spPr>
             <a:xfrm>
-              <a:off x="5405571" y="5785772"/>
+              <a:off x="5398776" y="5785772"/>
               <a:ext cx="62179" cy="80101"/>
             </a:xfrm>
             <a:prstGeom prst="rect">
@@ -5682,7 +5682,7 @@
           </p:nvSpPr>
           <p:spPr>
             <a:xfrm>
-              <a:off x="6288072" y="5785772"/>
+              <a:off x="6279673" y="5785772"/>
               <a:ext cx="124358" cy="80101"/>
             </a:xfrm>
             <a:prstGeom prst="rect">
@@ -5728,7 +5728,7 @@
           </p:nvSpPr>
           <p:spPr>
             <a:xfrm>
-              <a:off x="7201663" y="5785772"/>
+              <a:off x="7191659" y="5785772"/>
               <a:ext cx="124358" cy="80101"/>
             </a:xfrm>
             <a:prstGeom prst="rect">
@@ -5774,7 +5774,7 @@
           </p:nvSpPr>
           <p:spPr>
             <a:xfrm>
-              <a:off x="8115254" y="5785772"/>
+              <a:off x="8103645" y="5785772"/>
               <a:ext cx="124358" cy="80101"/>
             </a:xfrm>
             <a:prstGeom prst="rect">
@@ -5945,7 +5945,7 @@
                   <a:latin typeface="Helvetica"/>
                   <a:cs typeface="Helvetica"/>
                 </a:rPr>
-                <a:t>subHR per 10 % decline: 0.91 (0.70-1.19), p_Bonf = 1.000 (n = 6)  |  per IQR decline (Δ = 23.5 %): 0.81 (0.43-1.52)  |  IQR: [-21.0, 2.5] %</a:t>
+                <a:t>subHR per 10 % decline: 0.91 (0.70-1.19), p_Bonf = 1.000 (n = 6)  |  per IQR decline (Δ = 23.7 %): 0.81 (0.43-1.52)  |  IQR: [-21.1, 2.7] %</a:t>
               </a:r>
             </a:p>
           </p:txBody>
